--- a/downloads/DCT_V2_Ch15_Slides.pptx
+++ b/downloads/DCT_V2_Ch15_Slides.pptx
@@ -28,9 +28,10 @@
     <p:sldId id="276" r:id="rId22"/>
     <p:sldId id="277" r:id="rId23"/>
     <p:sldId id="278" r:id="rId24"/>
+    <p:sldId id="279" r:id="rId25"/>
   </p:sldIdLst>
   <p:notesMasterIdLst>
-    <p:notesMasterId r:id="rId25"/>
+    <p:notesMasterId r:id="rId26"/>
   </p:notesMasterIdLst>
   <p:sldSz cx="12192000" cy="6858000"/>
   <p:notesSz cx="6858000" cy="12192000"/>
@@ -129,7 +130,7 @@
   <p:extLst>
     <p:ext uri="{521415D9-36F7-43E2-AB2F-B90AF26B5E84}">
       <p14:sectionLst xmlns:p14="http://schemas.microsoft.com/office/powerpoint/2010/main">
-        <p14:section name="Opening" id="{04c72fc2-21f0-402b-3eff-d415777e7424}">
+        <p14:section name="Opening" id="{b573717b-773e-17f7-f79e-427e75426d2f}">
           <p14:sldIdLst>
             <p14:sldId id="256"/>
             <p14:sldId id="257"/>
@@ -137,38 +138,38 @@
             <p14:sldId id="259"/>
           </p14:sldIdLst>
         </p14:section>
-        <p14:section name="15.1 The Twin as a Declared Model" id="{c4e9768e-63f9-b5f8-9b45-6f600bc7150b}">
+        <p14:section name="15.1 The Twin as a Declared Model" id="{33507b22-43f2-ab4c-dc3a-6a686ef0e071}">
           <p14:sldIdLst>
             <p14:sldId id="260"/>
             <p14:sldId id="261"/>
           </p14:sldIdLst>
         </p14:section>
-        <p14:section name="15.2 Synchronizing the Twin" id="{28cb8931-ece0-895c-0e07-98600598e058}">
+        <p14:section name="15.2 Synchronizing the Twin" id="{3228c13f-feee-35a3-e176-3290dcb231ab}">
           <p14:sldIdLst>
             <p14:sldId id="262"/>
             <p14:sldId id="263"/>
             <p14:sldId id="264"/>
           </p14:sldIdLst>
         </p14:section>
-        <p14:section name="15.3 Deciding on the Twin" id="{36b35373-b714-1e8c-76c9-1c0c5960fe9b}">
+        <p14:section name="15.3 Deciding on the Twin" id="{81c1e59f-5575-61a5-1898-9938bc0369bf}">
           <p14:sldIdLst>
             <p14:sldId id="265"/>
             <p14:sldId id="266"/>
             <p14:sldId id="267"/>
           </p14:sldIdLst>
         </p14:section>
-        <p14:section name="15.4 Monitoring the Twin" id="{a843e158-999f-bcf8-94e2-8e5d17edcfdf}">
+        <p14:section name="15.4 Monitoring the Twin" id="{b5659fab-9358-7f12-415b-f0edf3214ed9}">
           <p14:sldIdLst>
             <p14:sldId id="268"/>
             <p14:sldId id="269"/>
           </p14:sldIdLst>
         </p14:section>
-        <p14:section name="15.5 Autonomy and Governance" id="{d0c04b2f-9d61-f6d2-4ed7-8e6f23a787ac}">
+        <p14:section name="15.5 Autonomy and Governance" id="{51c68813-f577-80d1-3599-d51340ef0133}">
           <p14:sldIdLst>
             <p14:sldId id="270"/>
           </p14:sldIdLst>
         </p14:section>
-        <p14:section name="Worked Example 15.1" id="{469dacc2-cb53-9f99-0330-ccbfdf49762b}">
+        <p14:section name="Worked Example 15.1" id="{555cdc4e-7e2f-2ca7-0394-4cbc2d52ff5f}">
           <p14:sldIdLst>
             <p14:sldId id="271"/>
             <p14:sldId id="272"/>
@@ -176,16 +177,21 @@
             <p14:sldId id="274"/>
           </p14:sldIdLst>
         </p14:section>
-        <p14:section name="AXIOM Lab 2.15" id="{87166b44-7e56-acb0-a3dc-d3d6caa6c89e}">
+        <p14:section name="In Practice" id="{fd6164f3-d488-7443-111d-5e812a186464}">
           <p14:sldIdLst>
             <p14:sldId id="275"/>
           </p14:sldIdLst>
         </p14:section>
-        <p14:section name="Close" id="{135730eb-bfb0-eb82-b881-eb77f29e326a}">
+        <p14:section name="AXIOM Lab 2.15" id="{0362b841-bbb4-6897-f96e-2171a7ec2333}">
           <p14:sldIdLst>
             <p14:sldId id="276"/>
+          </p14:sldIdLst>
+        </p14:section>
+        <p14:section name="Close" id="{1785089a-4871-31c1-8f7b-6be69edcfc43}">
+          <p14:sldIdLst>
             <p14:sldId id="277"/>
             <p14:sldId id="278"/>
+            <p14:sldId id="279"/>
           </p14:sldIdLst>
         </p14:section>
       </p14:sectionLst>
@@ -1648,7 +1654,7 @@
           <a:p>
             <a:r>
               <a:rPr lang="en-US" dirty="0"/>
-              <a:t>AXIOM Lab 2.15. What to look for: an error that settles between surveys (Theorem 15.1); a margin that must grow with the twin's error (Theorem 15.2(iii)); readings priced by what they save (Theorem 15.2(i)); a monitor that trades false alarms for speed (Theorem 15.3(ii)); and an uncertainty that runs on a calendar (Proposition 15.3(iii)).</a:t>
+              <a:t>In Practice, Chapter 15: Rolls-Royce Watches Every Engine in Flight. A real organization's decision of this chapter's kind, told from its published record; every figure is cited in the book. The lesson for Meridian: Monitoring detects change; it did not make the Trent 1000 durable, and selling outcomes means owning their risks. Sources: Rolls-Royce (2012, 2018, 2020, 2021, c. 2024); Waters (2009), Ingenia; Hayton et al. (2007); CIO.com (2021); McGee and Schmidt (1985), NASA.</a:t>
             </a:r>
             <a:endParaRPr lang="en-US" dirty="0"/>
           </a:p>
@@ -1736,7 +1742,7 @@
           <a:p>
             <a:r>
               <a:rPr lang="en-US" dirty="0"/>
-              <a:t>Key Takeaways, Chapter 15 (Definition 15.1 and Table 15.1; Theorem 15.1 and Proposition 15.1; Theorem 15.2; Theorem 15.3; Proposition 15.3).</a:t>
+              <a:t>AXIOM Lab 2.15. What to look for: an error that settles between surveys (Theorem 15.1); a margin that must grow with the twin's error (Theorem 15.2(iii)); readings priced by what they save (Theorem 15.2(i)); a monitor that trades false alarms for speed (Theorem 15.3(ii)); and an uncertainty that runs on a calendar (Proposition 15.3(iii)).</a:t>
             </a:r>
             <a:endParaRPr lang="en-US" dirty="0"/>
           </a:p>
@@ -1824,7 +1830,7 @@
           <a:p>
             <a:r>
               <a:rPr lang="en-US" dirty="0"/>
-              <a:t>The notebook and workbook are on the course website, www.dynamiccorporatetransformation.com.</a:t>
+              <a:t>Key Takeaways, Chapter 15 (Definition 15.1 and Table 15.1; Theorem 15.1 and Proposition 15.1; Theorem 15.2; Theorem 15.3; Proposition 15.3).</a:t>
             </a:r>
             <a:endParaRPr lang="en-US" dirty="0"/>
           </a:p>
@@ -1912,7 +1918,7 @@
           <a:p>
             <a:r>
               <a:rPr lang="en-US" dirty="0"/>
-              <a:t>The inequality is Theorem 15.2(i): readings never cost, and each gap is the value of the information it adds. Chapter 16, Enterprise Applications and Integrated Transformation Case Studies, opens Part V, Applications and Synthesis; its Worked Example 16.1 puts Volume II's pieces, the twin among them, into one program.</a:t>
+              <a:t>The notebook and workbook are on the course website, www.dynamiccorporatetransformation.com.</a:t>
             </a:r>
             <a:endParaRPr lang="en-US" dirty="0"/>
           </a:p>
@@ -1936,6 +1942,94 @@
             <a:fld id="{F7021451-1387-4CA6-816F-3879F97B5CBC}" type="slidenum">
               <a:rPr lang="en-US"/>
               <a:t>23</a:t>
+            </a:fld>
+            <a:endParaRPr lang="en-US"/>
+          </a:p>
+        </p:txBody>
+      </p:sp>
+    </p:spTree>
+    <p:extLst>
+      <p:ext uri="{BB962C8B-B14F-4D97-AF65-F5344CB8AC3E}">
+        <p14:creationId xmlns:p14="http://schemas.microsoft.com/office/powerpoint/2010/main" val="1024086991"/>
+      </p:ext>
+    </p:extLst>
+  </p:cSld>
+  <p:clrMapOvr>
+    <a:masterClrMapping/>
+  </p:clrMapOvr>
+</p:notes>
+</file>
+
+<file path=ppt/notesSlides/notesSlide24.xml><?xml version="1.0" encoding="utf-8"?>
+<p:notes xmlns:a="http://schemas.openxmlformats.org/drawingml/2006/main" xmlns:r="http://schemas.openxmlformats.org/officeDocument/2006/relationships" xmlns:p="http://schemas.openxmlformats.org/presentationml/2006/main">
+  <p:cSld>
+    <p:spTree>
+      <p:nvGrpSpPr>
+        <p:cNvPr id="1" name=""/>
+        <p:cNvGrpSpPr/>
+        <p:nvPr/>
+      </p:nvGrpSpPr>
+      <p:grpSpPr>
+        <a:xfrm>
+          <a:off x="0" y="0"/>
+          <a:ext cx="0" cy="0"/>
+          <a:chOff x="0" y="0"/>
+          <a:chExt cx="0" cy="0"/>
+        </a:xfrm>
+      </p:grpSpPr>
+      <p:sp>
+        <p:nvSpPr>
+          <p:cNvPr id="2" name="Slide Image Placeholder 1"/>
+          <p:cNvSpPr>
+            <a:spLocks noGrp="1" noRot="1" noChangeAspect="1"/>
+          </p:cNvSpPr>
+          <p:nvPr>
+            <p:ph type="sldImg"/>
+          </p:nvPr>
+        </p:nvSpPr>
+        <p:spPr/>
+      </p:sp>
+      <p:sp>
+        <p:nvSpPr>
+          <p:cNvPr id="3" name="Notes Placeholder 2"/>
+          <p:cNvSpPr>
+            <a:spLocks noGrp="1"/>
+          </p:cNvSpPr>
+          <p:nvPr>
+            <p:ph type="body" idx="1"/>
+          </p:nvPr>
+        </p:nvSpPr>
+        <p:spPr/>
+        <p:txBody>
+          <a:bodyPr/>
+          <a:lstStyle/>
+          <a:p>
+            <a:r>
+              <a:rPr lang="en-US" dirty="0"/>
+              <a:t>The inequality is Theorem 15.2(i): readings never cost, and each gap is the value of the information it adds. Chapter 16, Enterprise Applications and Integrated Transformation Case Studies, opens Part V, Applications and Synthesis; its Worked Example 16.1 puts Volume II's pieces, the twin among them, into one program.</a:t>
+            </a:r>
+            <a:endParaRPr lang="en-US" dirty="0"/>
+          </a:p>
+        </p:txBody>
+      </p:sp>
+      <p:sp>
+        <p:nvSpPr>
+          <p:cNvPr id="4" name="Slide Number Placeholder 3"/>
+          <p:cNvSpPr>
+            <a:spLocks noGrp="1"/>
+          </p:cNvSpPr>
+          <p:nvPr>
+            <p:ph type="sldNum" sz="quarter" idx="10"/>
+          </p:nvPr>
+        </p:nvSpPr>
+        <p:spPr/>
+        <p:txBody>
+          <a:bodyPr/>
+          <a:lstStyle/>
+          <a:p>
+            <a:fld id="{F7021451-1387-4CA6-816F-3879F97B5CBC}" type="slidenum">
+              <a:rPr lang="en-US"/>
+              <a:t>24</a:t>
             </a:fld>
             <a:endParaRPr lang="en-US"/>
           </a:p>
@@ -15576,7 +15670,7 @@
                   <a:schemeClr val="accent1"/>
                 </a:solidFill>
               </a:rPr>
-              <a:t>AXIOM LAB 2.15 · MODULE AXIOM-15</a:t>
+              <a:t>IN PRACTICE · ROLLS-ROYCE</a:t>
             </a:r>
             <a:endParaRPr lang="en-US" sz="1200" dirty="0"/>
           </a:p>
@@ -15617,804 +15711,26 @@
                 <a:ea typeface="Cambria" pitchFamily="34" charset="-122"/>
                 <a:cs typeface="Cambria" pitchFamily="34" charset="-120"/>
               </a:rPr>
-              <a:t>A twin for capability, in AXIOM</a:t>
+              <a:t>Rolls-Royce watches every engine in flight</a:t>
             </a:r>
             <a:endParaRPr lang="en-US" sz="3200" dirty="0"/>
           </a:p>
         </p:txBody>
       </p:sp>
-      <p:pic>
-        <p:nvPicPr>
-          <p:cNvPr id="5" name="AXIOM logo" descr="AXIOM">    </p:cNvPr>
-          <p:cNvPicPr>
-            <a:picLocks noChangeAspect="1"/>
-          </p:cNvPicPr>
-          <p:nvPr/>
-        </p:nvPicPr>
-        <p:blipFill>
-          <a:blip r:embed="rId1"/>
-          <a:stretch>
-            <a:fillRect/>
-          </a:stretch>
-        </p:blipFill>
-        <p:spPr>
-          <a:xfrm>
-            <a:off x="9539935" y="310896"/>
-            <a:ext cx="2103120" cy="420624"/>
-          </a:xfrm>
-          <a:prstGeom prst="rect">
-            <a:avLst/>
-          </a:prstGeom>
-        </p:spPr>
-      </p:pic>
-      <p:sp>
-        <p:nvSpPr>
-          <p:cNvPr id="6" name="Situation"/>
-          <p:cNvSpPr txBox="1"/>
-          <p:nvPr/>
-        </p:nvSpPr>
-        <p:spPr>
-          <a:xfrm>
-            <a:off x="548640" y="1645920"/>
-            <a:ext cx="11094415" cy="777240"/>
-          </a:xfrm>
-          <a:prstGeom prst="rect">
-            <a:avLst/>
-          </a:prstGeom>
-          <a:noFill/>
-          <a:ln/>
-        </p:spPr>
-        <p:txBody>
-          <a:bodyPr wrap="square" lIns="0" tIns="0" rIns="0" bIns="0" rtlCol="0" anchor="t"/>
-          <a:lstStyle/>
-          <a:p>
-            <a:pPr indent="0" marL="0">
-              <a:buNone/>
-            </a:pPr>
-            <a:r>
-              <a:rPr lang="en-US" sz="1500" dirty="0">
-                <a:solidFill>
-                  <a:schemeClr val="tx1"/>
-                </a:solidFill>
-              </a:rPr>
-              <a:t>The chief operating officer proposes to retire the engineering office's count and run Chapter 7's hiring rule on a digital twin fed by the skills survey. The audit committee wants to know what the twin would cost, which readings are worth buying, and how it would notice a change. Open AXIOM, choose Lab 2.15 and load the Meridian capability twin.</a:t>
-            </a:r>
-            <a:endParaRPr lang="en-US" sz="1500" dirty="0"/>
-          </a:p>
-        </p:txBody>
-      </p:sp>
-      <p:sp>
-        <p:nvSpPr>
-          <p:cNvPr id="7" name="Flow line"/>
+      <p:sp>
+        <p:nvSpPr>
+          <p:cNvPr id="5" name="Card"/>
           <p:cNvSpPr/>
           <p:nvPr/>
         </p:nvSpPr>
         <p:spPr>
           <a:xfrm>
-            <a:off x="1658082" y="2880360"/>
-            <a:ext cx="8875532" cy="0"/>
-          </a:xfrm>
-          <a:prstGeom prst="line">
-            <a:avLst/>
-          </a:prstGeom>
-          <a:noFill/>
-          <a:ln w="25400">
-            <a:solidFill>
-              <a:srgbClr val="C4CBD8"/>
-            </a:solidFill>
-            <a:prstDash val="solid"/>
-          </a:ln>
-        </p:spPr>
-      </p:sp>
-      <p:sp>
-        <p:nvSpPr>
-          <p:cNvPr id="8" name="Number"/>
-          <p:cNvSpPr/>
-          <p:nvPr/>
-        </p:nvSpPr>
-        <p:spPr>
-          <a:xfrm>
-            <a:off x="1383762" y="2606040"/>
-            <a:ext cx="548640" cy="548640"/>
-          </a:xfrm>
-          <a:prstGeom prst="ellipse">
-            <a:avLst/>
-          </a:prstGeom>
-          <a:solidFill>
-            <a:schemeClr val="accent1"/>
-          </a:solidFill>
-          <a:ln w="6350">
-            <a:solidFill>
-              <a:schemeClr val="accent1"/>
-            </a:solidFill>
-            <a:prstDash val="solid"/>
-          </a:ln>
-        </p:spPr>
-      </p:sp>
-      <p:sp>
-        <p:nvSpPr>
-          <p:cNvPr id="9" name="Text 5"/>
-          <p:cNvSpPr txBox="1"/>
-          <p:nvPr/>
-        </p:nvSpPr>
-        <p:spPr>
-          <a:xfrm>
-            <a:off x="1383762" y="2606040"/>
-            <a:ext cx="548640" cy="548640"/>
-          </a:xfrm>
-          <a:prstGeom prst="rect">
-            <a:avLst/>
-          </a:prstGeom>
-          <a:noFill/>
-          <a:ln/>
-        </p:spPr>
-        <p:txBody>
-          <a:bodyPr wrap="square" lIns="0" tIns="0" rIns="0" bIns="0" rtlCol="0" anchor="ctr"/>
-          <a:lstStyle/>
-          <a:p>
-            <a:pPr algn="ctr" indent="0" marL="0">
-              <a:buNone/>
-            </a:pPr>
-            <a:r>
-              <a:rPr lang="en-US" sz="1600" b="1" dirty="0">
-                <a:solidFill>
-                  <a:schemeClr val="bg1"/>
-                </a:solidFill>
-                <a:latin typeface="Calibri" pitchFamily="34" charset="0"/>
-                <a:ea typeface="Calibri" pitchFamily="34" charset="-122"/>
-                <a:cs typeface="Calibri" pitchFamily="34" charset="-120"/>
-              </a:rPr>
-              <a:t>1</a:t>
-            </a:r>
-            <a:endParaRPr lang="en-US" sz="1600" dirty="0"/>
-          </a:p>
-        </p:txBody>
-      </p:sp>
-      <p:sp>
-        <p:nvSpPr>
-          <p:cNvPr id="10" name="Flow head"/>
-          <p:cNvSpPr txBox="1"/>
-          <p:nvPr/>
-        </p:nvSpPr>
-        <p:spPr>
-          <a:xfrm>
-            <a:off x="621792" y="3291840"/>
-            <a:ext cx="2072579" cy="548640"/>
-          </a:xfrm>
-          <a:prstGeom prst="rect">
-            <a:avLst/>
-          </a:prstGeom>
-          <a:noFill/>
-          <a:ln/>
-        </p:spPr>
-        <p:txBody>
-          <a:bodyPr wrap="square" lIns="0" tIns="0" rIns="0" bIns="0" rtlCol="0" anchor="t"/>
-          <a:lstStyle/>
-          <a:p>
-            <a:pPr algn="ctr" indent="0" marL="0">
-              <a:buNone/>
-            </a:pPr>
-            <a:r>
-              <a:rPr lang="en-US" sz="1600" b="1" dirty="0">
-                <a:solidFill>
-                  <a:schemeClr val="tx1"/>
-                </a:solidFill>
-                <a:latin typeface="Cambria" pitchFamily="34" charset="0"/>
-                <a:ea typeface="Cambria" pitchFamily="34" charset="-122"/>
-                <a:cs typeface="Cambria" pitchFamily="34" charset="-120"/>
-              </a:rPr>
-              <a:t>Synchronize</a:t>
-            </a:r>
-            <a:endParaRPr lang="en-US" sz="1600" dirty="0"/>
-          </a:p>
-        </p:txBody>
-      </p:sp>
-      <p:sp>
-        <p:nvSpPr>
-          <p:cNvPr id="11" name="Flow text"/>
-          <p:cNvSpPr txBox="1"/>
-          <p:nvPr/>
-        </p:nvSpPr>
-        <p:spPr>
-          <a:xfrm>
-            <a:off x="640080" y="3867912"/>
-            <a:ext cx="2036003" cy="1554480"/>
-          </a:xfrm>
-          <a:prstGeom prst="rect">
-            <a:avLst/>
-          </a:prstGeom>
-          <a:noFill/>
-          <a:ln/>
-        </p:spPr>
-        <p:txBody>
-          <a:bodyPr wrap="square" lIns="0" tIns="0" rIns="0" bIns="0" rtlCol="0" anchor="t"/>
-          <a:lstStyle/>
-          <a:p>
-            <a:pPr algn="ctr" indent="0" marL="0">
-              <a:buNone/>
-            </a:pPr>
-            <a:r>
-              <a:rPr lang="en-US" sz="1400" dirty="0">
-                <a:solidFill>
-                  <a:schemeClr val="tx2"/>
-                </a:solidFill>
-              </a:rPr>
-              <a:t>Run the Kalman filter on simulated surveys; compare its error with the survey read as exact and with no readings.</a:t>
-            </a:r>
-            <a:endParaRPr lang="en-US" sz="1400" dirty="0"/>
-          </a:p>
-        </p:txBody>
-      </p:sp>
-      <p:sp>
-        <p:nvSpPr>
-          <p:cNvPr id="12" name="Number"/>
-          <p:cNvSpPr/>
-          <p:nvPr/>
-        </p:nvSpPr>
-        <p:spPr>
-          <a:xfrm>
-            <a:off x="3602645" y="2606040"/>
-            <a:ext cx="548640" cy="548640"/>
-          </a:xfrm>
-          <a:prstGeom prst="ellipse">
-            <a:avLst/>
-          </a:prstGeom>
-          <a:solidFill>
-            <a:schemeClr val="accent1"/>
-          </a:solidFill>
-          <a:ln w="6350">
-            <a:solidFill>
-              <a:schemeClr val="accent1"/>
-            </a:solidFill>
-            <a:prstDash val="solid"/>
-          </a:ln>
-        </p:spPr>
-      </p:sp>
-      <p:sp>
-        <p:nvSpPr>
-          <p:cNvPr id="13" name="Text 9"/>
-          <p:cNvSpPr txBox="1"/>
-          <p:nvPr/>
-        </p:nvSpPr>
-        <p:spPr>
-          <a:xfrm>
-            <a:off x="3602645" y="2606040"/>
-            <a:ext cx="548640" cy="548640"/>
-          </a:xfrm>
-          <a:prstGeom prst="rect">
-            <a:avLst/>
-          </a:prstGeom>
-          <a:noFill/>
-          <a:ln/>
-        </p:spPr>
-        <p:txBody>
-          <a:bodyPr wrap="square" lIns="0" tIns="0" rIns="0" bIns="0" rtlCol="0" anchor="ctr"/>
-          <a:lstStyle/>
-          <a:p>
-            <a:pPr algn="ctr" indent="0" marL="0">
-              <a:buNone/>
-            </a:pPr>
-            <a:r>
-              <a:rPr lang="en-US" sz="1600" b="1" dirty="0">
-                <a:solidFill>
-                  <a:schemeClr val="bg1"/>
-                </a:solidFill>
-                <a:latin typeface="Calibri" pitchFamily="34" charset="0"/>
-                <a:ea typeface="Calibri" pitchFamily="34" charset="-122"/>
-                <a:cs typeface="Calibri" pitchFamily="34" charset="-120"/>
-              </a:rPr>
-              <a:t>2</a:t>
-            </a:r>
-            <a:endParaRPr lang="en-US" sz="1600" dirty="0"/>
-          </a:p>
-        </p:txBody>
-      </p:sp>
-      <p:sp>
-        <p:nvSpPr>
-          <p:cNvPr id="14" name="Flow head"/>
-          <p:cNvSpPr txBox="1"/>
-          <p:nvPr/>
-        </p:nvSpPr>
-        <p:spPr>
-          <a:xfrm>
-            <a:off x="2840675" y="3291840"/>
-            <a:ext cx="2072579" cy="548640"/>
-          </a:xfrm>
-          <a:prstGeom prst="rect">
-            <a:avLst/>
-          </a:prstGeom>
-          <a:noFill/>
-          <a:ln/>
-        </p:spPr>
-        <p:txBody>
-          <a:bodyPr wrap="square" lIns="0" tIns="0" rIns="0" bIns="0" rtlCol="0" anchor="t"/>
-          <a:lstStyle/>
-          <a:p>
-            <a:pPr algn="ctr" indent="0" marL="0">
-              <a:buNone/>
-            </a:pPr>
-            <a:r>
-              <a:rPr lang="en-US" sz="1600" b="1" dirty="0">
-                <a:solidFill>
-                  <a:schemeClr val="tx1"/>
-                </a:solidFill>
-                <a:latin typeface="Cambria" pitchFamily="34" charset="0"/>
-                <a:ea typeface="Cambria" pitchFamily="34" charset="-122"/>
-                <a:cs typeface="Cambria" pitchFamily="34" charset="-120"/>
-              </a:rPr>
-              <a:t>Decide</a:t>
-            </a:r>
-            <a:endParaRPr lang="en-US" sz="1600" dirty="0"/>
-          </a:p>
-        </p:txBody>
-      </p:sp>
-      <p:sp>
-        <p:nvSpPr>
-          <p:cNvPr id="15" name="Flow text"/>
-          <p:cNvSpPr txBox="1"/>
-          <p:nvPr/>
-        </p:nvSpPr>
-        <p:spPr>
-          <a:xfrm>
-            <a:off x="2858963" y="3867912"/>
-            <a:ext cx="2036003" cy="1554480"/>
-          </a:xfrm>
-          <a:prstGeom prst="rect">
-            <a:avLst/>
-          </a:prstGeom>
-          <a:noFill/>
-          <a:ln/>
-        </p:spPr>
-        <p:txBody>
-          <a:bodyPr wrap="square" lIns="0" tIns="0" rIns="0" bIns="0" rtlCol="0" anchor="t"/>
-          <a:lstStyle/>
-          <a:p>
-            <a:pPr algn="ctr" indent="0" marL="0">
-              <a:buNone/>
-            </a:pPr>
-            <a:r>
-              <a:rPr lang="en-US" sz="1400" dirty="0">
-                <a:solidFill>
-                  <a:schemeClr val="tx2"/>
-                </a:solidFill>
-              </a:rPr>
-              <a:t>Sweep the target for the count, the twin and the survey read as exact; mark each best target and its cost on fresh paths.</a:t>
-            </a:r>
-            <a:endParaRPr lang="en-US" sz="1400" dirty="0"/>
-          </a:p>
-        </p:txBody>
-      </p:sp>
-      <p:sp>
-        <p:nvSpPr>
-          <p:cNvPr id="16" name="Number"/>
-          <p:cNvSpPr/>
-          <p:nvPr/>
-        </p:nvSpPr>
-        <p:spPr>
-          <a:xfrm>
-            <a:off x="5821528" y="2606040"/>
-            <a:ext cx="548640" cy="548640"/>
-          </a:xfrm>
-          <a:prstGeom prst="ellipse">
-            <a:avLst/>
-          </a:prstGeom>
-          <a:solidFill>
-            <a:schemeClr val="accent1"/>
-          </a:solidFill>
-          <a:ln w="6350">
-            <a:solidFill>
-              <a:schemeClr val="accent1"/>
-            </a:solidFill>
-            <a:prstDash val="solid"/>
-          </a:ln>
-        </p:spPr>
-      </p:sp>
-      <p:sp>
-        <p:nvSpPr>
-          <p:cNvPr id="17" name="Text 13"/>
-          <p:cNvSpPr txBox="1"/>
-          <p:nvPr/>
-        </p:nvSpPr>
-        <p:spPr>
-          <a:xfrm>
-            <a:off x="5821528" y="2606040"/>
-            <a:ext cx="548640" cy="548640"/>
-          </a:xfrm>
-          <a:prstGeom prst="rect">
-            <a:avLst/>
-          </a:prstGeom>
-          <a:noFill/>
-          <a:ln/>
-        </p:spPr>
-        <p:txBody>
-          <a:bodyPr wrap="square" lIns="0" tIns="0" rIns="0" bIns="0" rtlCol="0" anchor="ctr"/>
-          <a:lstStyle/>
-          <a:p>
-            <a:pPr algn="ctr" indent="0" marL="0">
-              <a:buNone/>
-            </a:pPr>
-            <a:r>
-              <a:rPr lang="en-US" sz="1600" b="1" dirty="0">
-                <a:solidFill>
-                  <a:schemeClr val="bg1"/>
-                </a:solidFill>
-                <a:latin typeface="Calibri" pitchFamily="34" charset="0"/>
-                <a:ea typeface="Calibri" pitchFamily="34" charset="-122"/>
-                <a:cs typeface="Calibri" pitchFamily="34" charset="-120"/>
-              </a:rPr>
-              <a:t>3</a:t>
-            </a:r>
-            <a:endParaRPr lang="en-US" sz="1600" dirty="0"/>
-          </a:p>
-        </p:txBody>
-      </p:sp>
-      <p:sp>
-        <p:nvSpPr>
-          <p:cNvPr id="18" name="Flow head"/>
-          <p:cNvSpPr txBox="1"/>
-          <p:nvPr/>
-        </p:nvSpPr>
-        <p:spPr>
-          <a:xfrm>
-            <a:off x="5059558" y="3291840"/>
-            <a:ext cx="2072579" cy="548640"/>
-          </a:xfrm>
-          <a:prstGeom prst="rect">
-            <a:avLst/>
-          </a:prstGeom>
-          <a:noFill/>
-          <a:ln/>
-        </p:spPr>
-        <p:txBody>
-          <a:bodyPr wrap="square" lIns="0" tIns="0" rIns="0" bIns="0" rtlCol="0" anchor="t"/>
-          <a:lstStyle/>
-          <a:p>
-            <a:pPr algn="ctr" indent="0" marL="0">
-              <a:buNone/>
-            </a:pPr>
-            <a:r>
-              <a:rPr lang="en-US" sz="1600" b="1" dirty="0">
-                <a:solidFill>
-                  <a:schemeClr val="tx1"/>
-                </a:solidFill>
-                <a:latin typeface="Cambria" pitchFamily="34" charset="0"/>
-                <a:ea typeface="Cambria" pitchFamily="34" charset="-122"/>
-                <a:cs typeface="Cambria" pitchFamily="34" charset="-120"/>
-              </a:rPr>
-              <a:t>Price readings</a:t>
-            </a:r>
-            <a:endParaRPr lang="en-US" sz="1600" dirty="0"/>
-          </a:p>
-        </p:txBody>
-      </p:sp>
-      <p:sp>
-        <p:nvSpPr>
-          <p:cNvPr id="19" name="Flow text"/>
-          <p:cNvSpPr txBox="1"/>
-          <p:nvPr/>
-        </p:nvSpPr>
-        <p:spPr>
-          <a:xfrm>
-            <a:off x="5077846" y="3867912"/>
-            <a:ext cx="2036003" cy="1554480"/>
-          </a:xfrm>
-          <a:prstGeom prst="rect">
-            <a:avLst/>
-          </a:prstGeom>
-          <a:noFill/>
-          <a:ln/>
-        </p:spPr>
-        <p:txBody>
-          <a:bodyPr wrap="square" lIns="0" tIns="0" rIns="0" bIns="0" rtlCol="0" anchor="t"/>
-          <a:lstStyle/>
-          <a:p>
-            <a:pPr algn="ctr" indent="0" marL="0">
-              <a:buNone/>
-            </a:pPr>
-            <a:r>
-              <a:rPr lang="en-US" sz="1400" dirty="0">
-                <a:solidFill>
-                  <a:schemeClr val="tx2"/>
-                </a:solidFill>
-              </a:rPr>
-              <a:t>Vary the survey's frequency and error, and price each design against the count.</a:t>
-            </a:r>
-            <a:endParaRPr lang="en-US" sz="1400" dirty="0"/>
-          </a:p>
-        </p:txBody>
-      </p:sp>
-      <p:sp>
-        <p:nvSpPr>
-          <p:cNvPr id="20" name="Number"/>
-          <p:cNvSpPr/>
-          <p:nvPr/>
-        </p:nvSpPr>
-        <p:spPr>
-          <a:xfrm>
-            <a:off x="8040411" y="2606040"/>
-            <a:ext cx="548640" cy="548640"/>
-          </a:xfrm>
-          <a:prstGeom prst="ellipse">
-            <a:avLst/>
-          </a:prstGeom>
-          <a:solidFill>
-            <a:schemeClr val="accent1"/>
-          </a:solidFill>
-          <a:ln w="6350">
-            <a:solidFill>
-              <a:schemeClr val="accent1"/>
-            </a:solidFill>
-            <a:prstDash val="solid"/>
-          </a:ln>
-        </p:spPr>
-      </p:sp>
-      <p:sp>
-        <p:nvSpPr>
-          <p:cNvPr id="21" name="Text 17"/>
-          <p:cNvSpPr txBox="1"/>
-          <p:nvPr/>
-        </p:nvSpPr>
-        <p:spPr>
-          <a:xfrm>
-            <a:off x="8040411" y="2606040"/>
-            <a:ext cx="548640" cy="548640"/>
-          </a:xfrm>
-          <a:prstGeom prst="rect">
-            <a:avLst/>
-          </a:prstGeom>
-          <a:noFill/>
-          <a:ln/>
-        </p:spPr>
-        <p:txBody>
-          <a:bodyPr wrap="square" lIns="0" tIns="0" rIns="0" bIns="0" rtlCol="0" anchor="ctr"/>
-          <a:lstStyle/>
-          <a:p>
-            <a:pPr algn="ctr" indent="0" marL="0">
-              <a:buNone/>
-            </a:pPr>
-            <a:r>
-              <a:rPr lang="en-US" sz="1600" b="1" dirty="0">
-                <a:solidFill>
-                  <a:schemeClr val="bg1"/>
-                </a:solidFill>
-                <a:latin typeface="Calibri" pitchFamily="34" charset="0"/>
-                <a:ea typeface="Calibri" pitchFamily="34" charset="-122"/>
-                <a:cs typeface="Calibri" pitchFamily="34" charset="-120"/>
-              </a:rPr>
-              <a:t>4</a:t>
-            </a:r>
-            <a:endParaRPr lang="en-US" sz="1600" dirty="0"/>
-          </a:p>
-        </p:txBody>
-      </p:sp>
-      <p:sp>
-        <p:nvSpPr>
-          <p:cNvPr id="22" name="Flow head"/>
-          <p:cNvSpPr txBox="1"/>
-          <p:nvPr/>
-        </p:nvSpPr>
-        <p:spPr>
-          <a:xfrm>
-            <a:off x="7278441" y="3291840"/>
-            <a:ext cx="2072579" cy="548640"/>
-          </a:xfrm>
-          <a:prstGeom prst="rect">
-            <a:avLst/>
-          </a:prstGeom>
-          <a:noFill/>
-          <a:ln/>
-        </p:spPr>
-        <p:txBody>
-          <a:bodyPr wrap="square" lIns="0" tIns="0" rIns="0" bIns="0" rtlCol="0" anchor="t"/>
-          <a:lstStyle/>
-          <a:p>
-            <a:pPr algn="ctr" indent="0" marL="0">
-              <a:buNone/>
-            </a:pPr>
-            <a:r>
-              <a:rPr lang="en-US" sz="1600" b="1" dirty="0">
-                <a:solidFill>
-                  <a:schemeClr val="tx1"/>
-                </a:solidFill>
-                <a:latin typeface="Cambria" pitchFamily="34" charset="0"/>
-                <a:ea typeface="Cambria" pitchFamily="34" charset="-122"/>
-                <a:cs typeface="Cambria" pitchFamily="34" charset="-120"/>
-              </a:rPr>
-              <a:t>Monitor</a:t>
-            </a:r>
-            <a:endParaRPr lang="en-US" sz="1600" dirty="0"/>
-          </a:p>
-        </p:txBody>
-      </p:sp>
-      <p:sp>
-        <p:nvSpPr>
-          <p:cNvPr id="23" name="Flow text"/>
-          <p:cNvSpPr txBox="1"/>
-          <p:nvPr/>
-        </p:nvSpPr>
-        <p:spPr>
-          <a:xfrm>
-            <a:off x="7296729" y="3867912"/>
-            <a:ext cx="2036003" cy="1554480"/>
-          </a:xfrm>
-          <a:prstGeom prst="rect">
-            <a:avLst/>
-          </a:prstGeom>
-          <a:noFill/>
-          <a:ln/>
-        </p:spPr>
-        <p:txBody>
-          <a:bodyPr wrap="square" lIns="0" tIns="0" rIns="0" bIns="0" rtlCol="0" anchor="t"/>
-          <a:lstStyle/>
-          <a:p>
-            <a:pPr algn="ctr" indent="0" marL="0">
-              <a:buNone/>
-            </a:pPr>
-            <a:r>
-              <a:rPr lang="en-US" sz="1400" dirty="0">
-                <a:solidFill>
-                  <a:schemeClr val="tx2"/>
-                </a:solidFill>
-              </a:rPr>
-              <a:t>Set the cumulative sum's threshold for a false-alarm rate, and test it on a drift in the law.</a:t>
-            </a:r>
-            <a:endParaRPr lang="en-US" sz="1400" dirty="0"/>
-          </a:p>
-        </p:txBody>
-      </p:sp>
-      <p:sp>
-        <p:nvSpPr>
-          <p:cNvPr id="24" name="Number"/>
-          <p:cNvSpPr/>
-          <p:nvPr/>
-        </p:nvSpPr>
-        <p:spPr>
-          <a:xfrm>
-            <a:off x="10259294" y="2606040"/>
-            <a:ext cx="548640" cy="548640"/>
-          </a:xfrm>
-          <a:prstGeom prst="ellipse">
-            <a:avLst/>
-          </a:prstGeom>
-          <a:solidFill>
-            <a:schemeClr val="accent1"/>
-          </a:solidFill>
-          <a:ln w="6350">
-            <a:solidFill>
-              <a:schemeClr val="accent1"/>
-            </a:solidFill>
-            <a:prstDash val="solid"/>
-          </a:ln>
-        </p:spPr>
-      </p:sp>
-      <p:sp>
-        <p:nvSpPr>
-          <p:cNvPr id="25" name="Text 21"/>
-          <p:cNvSpPr txBox="1"/>
-          <p:nvPr/>
-        </p:nvSpPr>
-        <p:spPr>
-          <a:xfrm>
-            <a:off x="10259294" y="2606040"/>
-            <a:ext cx="548640" cy="548640"/>
-          </a:xfrm>
-          <a:prstGeom prst="rect">
-            <a:avLst/>
-          </a:prstGeom>
-          <a:noFill/>
-          <a:ln/>
-        </p:spPr>
-        <p:txBody>
-          <a:bodyPr wrap="square" lIns="0" tIns="0" rIns="0" bIns="0" rtlCol="0" anchor="ctr"/>
-          <a:lstStyle/>
-          <a:p>
-            <a:pPr algn="ctr" indent="0" marL="0">
-              <a:buNone/>
-            </a:pPr>
-            <a:r>
-              <a:rPr lang="en-US" sz="1600" b="1" dirty="0">
-                <a:solidFill>
-                  <a:schemeClr val="bg1"/>
-                </a:solidFill>
-                <a:latin typeface="Calibri" pitchFamily="34" charset="0"/>
-                <a:ea typeface="Calibri" pitchFamily="34" charset="-122"/>
-                <a:cs typeface="Calibri" pitchFamily="34" charset="-120"/>
-              </a:rPr>
-              <a:t>5</a:t>
-            </a:r>
-            <a:endParaRPr lang="en-US" sz="1600" dirty="0"/>
-          </a:p>
-        </p:txBody>
-      </p:sp>
-      <p:sp>
-        <p:nvSpPr>
-          <p:cNvPr id="26" name="Flow head"/>
-          <p:cNvSpPr txBox="1"/>
-          <p:nvPr/>
-        </p:nvSpPr>
-        <p:spPr>
-          <a:xfrm>
-            <a:off x="9497324" y="3291840"/>
-            <a:ext cx="2072579" cy="548640"/>
-          </a:xfrm>
-          <a:prstGeom prst="rect">
-            <a:avLst/>
-          </a:prstGeom>
-          <a:noFill/>
-          <a:ln/>
-        </p:spPr>
-        <p:txBody>
-          <a:bodyPr wrap="square" lIns="0" tIns="0" rIns="0" bIns="0" rtlCol="0" anchor="t"/>
-          <a:lstStyle/>
-          <a:p>
-            <a:pPr algn="ctr" indent="0" marL="0">
-              <a:buNone/>
-            </a:pPr>
-            <a:r>
-              <a:rPr lang="en-US" sz="1600" b="1" dirty="0">
-                <a:solidFill>
-                  <a:schemeClr val="tx1"/>
-                </a:solidFill>
-                <a:latin typeface="Cambria" pitchFamily="34" charset="0"/>
-                <a:ea typeface="Cambria" pitchFamily="34" charset="-122"/>
-                <a:cs typeface="Cambria" pitchFamily="34" charset="-120"/>
-              </a:rPr>
-              <a:t>Set the envelope</a:t>
-            </a:r>
-            <a:endParaRPr lang="en-US" sz="1600" dirty="0"/>
-          </a:p>
-        </p:txBody>
-      </p:sp>
-      <p:sp>
-        <p:nvSpPr>
-          <p:cNvPr id="27" name="Flow text"/>
-          <p:cNvSpPr txBox="1"/>
-          <p:nvPr/>
-        </p:nvSpPr>
-        <p:spPr>
-          <a:xfrm>
-            <a:off x="9515612" y="3867912"/>
-            <a:ext cx="2036003" cy="1554480"/>
-          </a:xfrm>
-          <a:prstGeom prst="rect">
-            <a:avLst/>
-          </a:prstGeom>
-          <a:noFill/>
-          <a:ln/>
-        </p:spPr>
-        <p:txBody>
-          <a:bodyPr wrap="square" lIns="0" tIns="0" rIns="0" bIns="0" rtlCol="0" anchor="t"/>
-          <a:lstStyle/>
-          <a:p>
-            <a:pPr algn="ctr" indent="0" marL="0">
-              <a:buNone/>
-            </a:pPr>
-            <a:r>
-              <a:rPr lang="en-US" sz="1400" dirty="0">
-                <a:solidFill>
-                  <a:schemeClr val="tx2"/>
-                </a:solidFill>
-              </a:rPr>
-              <a:t>Decide what the twin may do alone and when it escalates.</a:t>
-            </a:r>
-            <a:endParaRPr lang="en-US" sz="1400" dirty="0"/>
-          </a:p>
-        </p:txBody>
-      </p:sp>
-      <p:sp>
-        <p:nvSpPr>
-          <p:cNvPr id="28" name="Deliverable card"/>
-          <p:cNvSpPr/>
-          <p:nvPr/>
-        </p:nvSpPr>
-        <p:spPr>
-          <a:xfrm>
-            <a:off x="548640" y="5486400"/>
-            <a:ext cx="11094415" cy="685800"/>
+            <a:off x="548640" y="1691640"/>
+            <a:ext cx="3515258" cy="2103120"/>
           </a:xfrm>
           <a:prstGeom prst="roundRect">
             <a:avLst>
-              <a:gd name="adj" fmla="val 10667"/>
+              <a:gd name="adj" fmla="val 3478"/>
             </a:avLst>
           </a:prstGeom>
           <a:solidFill>
@@ -16430,14 +15746,14 @@
       </p:sp>
       <p:sp>
         <p:nvSpPr>
-          <p:cNvPr id="29" name="Deliverable"/>
+          <p:cNvPr id="6" name="Card label"/>
           <p:cNvSpPr txBox="1"/>
           <p:nvPr/>
         </p:nvSpPr>
         <p:spPr>
           <a:xfrm>
-            <a:off x="777240" y="5559552"/>
-            <a:ext cx="10637215" cy="539496"/>
+            <a:off x="731520" y="1819656"/>
+            <a:ext cx="3149498" cy="310896"/>
           </a:xfrm>
           <a:prstGeom prst="rect">
             <a:avLst/>
@@ -16453,22 +15769,779 @@
               <a:buNone/>
             </a:pPr>
             <a:r>
-              <a:rPr lang="en-US" sz="1400" b="1" dirty="0">
-                <a:solidFill>
-                  <a:schemeClr val="tx1"/>
-                </a:solidFill>
-              </a:rPr>
-              <a:t>Deliverable:</a:t>
-            </a:r>
-            <a:r>
-              <a:rPr lang="en-US" sz="1400" dirty="0">
-                <a:solidFill>
-                  <a:schemeClr val="tx1"/>
-                </a:solidFill>
-              </a:rPr>
-              <a:t> a one-page note to the board: whether to retire the count, the twin's rule and margin, the readings worth buying, and the monitor and envelope the twin should run under. About 75 minutes.</a:t>
-            </a:r>
-            <a:endParaRPr lang="en-US" sz="1400" dirty="0"/>
+              <a:rPr lang="en-US" sz="1300" b="1" dirty="0">
+                <a:solidFill>
+                  <a:schemeClr val="accent1"/>
+                </a:solidFill>
+              </a:rPr>
+              <a:t>The decision</a:t>
+            </a:r>
+            <a:endParaRPr lang="en-US" sz="1300" dirty="0"/>
+          </a:p>
+        </p:txBody>
+      </p:sp>
+      <p:sp>
+        <p:nvSpPr>
+          <p:cNvPr id="7" name="Card head"/>
+          <p:cNvSpPr txBox="1"/>
+          <p:nvPr/>
+        </p:nvSpPr>
+        <p:spPr>
+          <a:xfrm>
+            <a:off x="731520" y="2148840"/>
+            <a:ext cx="3149498" cy="576072"/>
+          </a:xfrm>
+          <a:prstGeom prst="rect">
+            <a:avLst/>
+          </a:prstGeom>
+          <a:noFill/>
+          <a:ln/>
+        </p:spPr>
+        <p:txBody>
+          <a:bodyPr wrap="square" lIns="0" tIns="0" rIns="0" bIns="0" rtlCol="0" anchor="t"/>
+          <a:lstStyle/>
+          <a:p>
+            <a:pPr indent="0" marL="0">
+              <a:buNone/>
+            </a:pPr>
+            <a:r>
+              <a:rPr lang="en-US" sz="1600" b="1" dirty="0">
+                <a:solidFill>
+                  <a:schemeClr val="tx1"/>
+                </a:solidFill>
+                <a:latin typeface="Cambria" pitchFamily="34" charset="0"/>
+                <a:ea typeface="Cambria" pitchFamily="34" charset="-122"/>
+                <a:cs typeface="Cambria" pitchFamily="34" charset="-120"/>
+              </a:rPr>
+              <a:t>Act on an engine, or not</a:t>
+            </a:r>
+            <a:endParaRPr lang="en-US" sz="1600" dirty="0"/>
+          </a:p>
+        </p:txBody>
+      </p:sp>
+      <p:sp>
+        <p:nvSpPr>
+          <p:cNvPr id="8" name="Card text"/>
+          <p:cNvSpPr txBox="1"/>
+          <p:nvPr/>
+        </p:nvSpPr>
+        <p:spPr>
+          <a:xfrm>
+            <a:off x="731520" y="2798064"/>
+            <a:ext cx="3149498" cy="868680"/>
+          </a:xfrm>
+          <a:prstGeom prst="rect">
+            <a:avLst/>
+          </a:prstGeom>
+          <a:noFill/>
+          <a:ln/>
+        </p:spPr>
+        <p:txBody>
+          <a:bodyPr wrap="square" lIns="0" tIns="0" rIns="0" bIns="0" rtlCol="0" anchor="t"/>
+          <a:lstStyle/>
+          <a:p>
+            <a:pPr indent="0" marL="0">
+              <a:buNone/>
+            </a:pPr>
+            <a:r>
+              <a:rPr lang="en-US" sz="1300" dirty="0">
+                <a:solidFill>
+                  <a:schemeClr val="tx2"/>
+                </a:solidFill>
+              </a:rPr>
+              <a:t>Paid by the flying hour, the company decides when an engine's readings call for action.</a:t>
+            </a:r>
+            <a:endParaRPr lang="en-US" sz="1300" dirty="0"/>
+          </a:p>
+        </p:txBody>
+      </p:sp>
+      <p:sp>
+        <p:nvSpPr>
+          <p:cNvPr id="9" name="Card"/>
+          <p:cNvSpPr/>
+          <p:nvPr/>
+        </p:nvSpPr>
+        <p:spPr>
+          <a:xfrm>
+            <a:off x="4338218" y="1691640"/>
+            <a:ext cx="3515258" cy="2103120"/>
+          </a:xfrm>
+          <a:prstGeom prst="roundRect">
+            <a:avLst>
+              <a:gd name="adj" fmla="val 3478"/>
+            </a:avLst>
+          </a:prstGeom>
+          <a:solidFill>
+            <a:schemeClr val="bg2"/>
+          </a:solidFill>
+          <a:ln w="9525">
+            <a:solidFill>
+              <a:srgbClr val="C4CBD8"/>
+            </a:solidFill>
+            <a:prstDash val="solid"/>
+          </a:ln>
+        </p:spPr>
+      </p:sp>
+      <p:sp>
+        <p:nvSpPr>
+          <p:cNvPr id="10" name="Card label"/>
+          <p:cNvSpPr txBox="1"/>
+          <p:nvPr/>
+        </p:nvSpPr>
+        <p:spPr>
+          <a:xfrm>
+            <a:off x="4521098" y="1819656"/>
+            <a:ext cx="3149498" cy="310896"/>
+          </a:xfrm>
+          <a:prstGeom prst="rect">
+            <a:avLst/>
+          </a:prstGeom>
+          <a:noFill/>
+          <a:ln/>
+        </p:spPr>
+        <p:txBody>
+          <a:bodyPr wrap="square" lIns="0" tIns="0" rIns="0" bIns="0" rtlCol="0" anchor="ctr"/>
+          <a:lstStyle/>
+          <a:p>
+            <a:pPr indent="0" marL="0">
+              <a:buNone/>
+            </a:pPr>
+            <a:r>
+              <a:rPr lang="en-US" sz="1300" b="1" dirty="0">
+                <a:solidFill>
+                  <a:schemeClr val="accent1"/>
+                </a:solidFill>
+              </a:rPr>
+              <a:t>The method</a:t>
+            </a:r>
+            <a:endParaRPr lang="en-US" sz="1300" dirty="0"/>
+          </a:p>
+        </p:txBody>
+      </p:sp>
+      <p:sp>
+        <p:nvSpPr>
+          <p:cNvPr id="11" name="Card head"/>
+          <p:cNvSpPr txBox="1"/>
+          <p:nvPr/>
+        </p:nvSpPr>
+        <p:spPr>
+          <a:xfrm>
+            <a:off x="4521098" y="2148840"/>
+            <a:ext cx="3149498" cy="576072"/>
+          </a:xfrm>
+          <a:prstGeom prst="rect">
+            <a:avLst/>
+          </a:prstGeom>
+          <a:noFill/>
+          <a:ln/>
+        </p:spPr>
+        <p:txBody>
+          <a:bodyPr wrap="square" lIns="0" tIns="0" rIns="0" bIns="0" rtlCol="0" anchor="t"/>
+          <a:lstStyle/>
+          <a:p>
+            <a:pPr indent="0" marL="0">
+              <a:buNone/>
+            </a:pPr>
+            <a:r>
+              <a:rPr lang="en-US" sz="1600" b="1" dirty="0">
+                <a:solidFill>
+                  <a:schemeClr val="tx1"/>
+                </a:solidFill>
+                <a:latin typeface="Cambria" pitchFamily="34" charset="0"/>
+                <a:ea typeface="Cambria" pitchFamily="34" charset="-122"/>
+                <a:cs typeface="Cambria" pitchFamily="34" charset="-120"/>
+              </a:rPr>
+              <a:t>Trend the readings, escalate change</a:t>
+            </a:r>
+            <a:endParaRPr lang="en-US" sz="1600" dirty="0"/>
+          </a:p>
+        </p:txBody>
+      </p:sp>
+      <p:sp>
+        <p:nvSpPr>
+          <p:cNvPr id="12" name="Card text"/>
+          <p:cNvSpPr txBox="1"/>
+          <p:nvPr/>
+        </p:nvSpPr>
+        <p:spPr>
+          <a:xfrm>
+            <a:off x="4521098" y="2798064"/>
+            <a:ext cx="3149498" cy="868680"/>
+          </a:xfrm>
+          <a:prstGeom prst="rect">
+            <a:avLst/>
+          </a:prstGeom>
+          <a:noFill/>
+          <a:ln/>
+        </p:spPr>
+        <p:txBody>
+          <a:bodyPr wrap="square" lIns="0" tIns="0" rIns="0" bIns="0" rtlCol="0" anchor="t"/>
+          <a:lstStyle/>
+          <a:p>
+            <a:pPr indent="0" marL="0">
+              <a:buNone/>
+            </a:pPr>
+            <a:r>
+              <a:rPr lang="en-US" sz="1300" dirty="0">
+                <a:solidFill>
+                  <a:schemeClr val="tx2"/>
+                </a:solidFill>
+              </a:rPr>
+              <a:t>Snapshots of 20–30 parameters a flight, trended; an analyst confirms a change before the airline is told.</a:t>
+            </a:r>
+            <a:endParaRPr lang="en-US" sz="1300" dirty="0"/>
+          </a:p>
+        </p:txBody>
+      </p:sp>
+      <p:sp>
+        <p:nvSpPr>
+          <p:cNvPr id="13" name="Card"/>
+          <p:cNvSpPr/>
+          <p:nvPr/>
+        </p:nvSpPr>
+        <p:spPr>
+          <a:xfrm>
+            <a:off x="8127797" y="1691640"/>
+            <a:ext cx="3515258" cy="2103120"/>
+          </a:xfrm>
+          <a:prstGeom prst="roundRect">
+            <a:avLst>
+              <a:gd name="adj" fmla="val 3478"/>
+            </a:avLst>
+          </a:prstGeom>
+          <a:solidFill>
+            <a:schemeClr val="tx1"/>
+          </a:solidFill>
+          <a:ln w="9525">
+            <a:solidFill>
+              <a:srgbClr val="0F1E3D"/>
+            </a:solidFill>
+            <a:prstDash val="solid"/>
+          </a:ln>
+        </p:spPr>
+      </p:sp>
+      <p:sp>
+        <p:nvSpPr>
+          <p:cNvPr id="14" name="Card label"/>
+          <p:cNvSpPr txBox="1"/>
+          <p:nvPr/>
+        </p:nvSpPr>
+        <p:spPr>
+          <a:xfrm>
+            <a:off x="8310677" y="1819656"/>
+            <a:ext cx="3149498" cy="310896"/>
+          </a:xfrm>
+          <a:prstGeom prst="rect">
+            <a:avLst/>
+          </a:prstGeom>
+          <a:noFill/>
+          <a:ln/>
+        </p:spPr>
+        <p:txBody>
+          <a:bodyPr wrap="square" lIns="0" tIns="0" rIns="0" bIns="0" rtlCol="0" anchor="ctr"/>
+          <a:lstStyle/>
+          <a:p>
+            <a:pPr indent="0" marL="0">
+              <a:buNone/>
+            </a:pPr>
+            <a:r>
+              <a:rPr lang="en-US" sz="1300" b="1" dirty="0">
+                <a:solidFill>
+                  <a:schemeClr val="accent1"/>
+                </a:solidFill>
+              </a:rPr>
+              <a:t>The result</a:t>
+            </a:r>
+            <a:endParaRPr lang="en-US" sz="1300" dirty="0"/>
+          </a:p>
+        </p:txBody>
+      </p:sp>
+      <p:sp>
+        <p:nvSpPr>
+          <p:cNvPr id="15" name="Card head"/>
+          <p:cNvSpPr txBox="1"/>
+          <p:nvPr/>
+        </p:nvSpPr>
+        <p:spPr>
+          <a:xfrm>
+            <a:off x="8310677" y="2148840"/>
+            <a:ext cx="3149498" cy="576072"/>
+          </a:xfrm>
+          <a:prstGeom prst="rect">
+            <a:avLst/>
+          </a:prstGeom>
+          <a:noFill/>
+          <a:ln/>
+        </p:spPr>
+        <p:txBody>
+          <a:bodyPr wrap="square" lIns="0" tIns="0" rIns="0" bIns="0" rtlCol="0" anchor="t"/>
+          <a:lstStyle/>
+          <a:p>
+            <a:pPr indent="0" marL="0">
+              <a:buNone/>
+            </a:pPr>
+            <a:r>
+              <a:rPr lang="en-US" sz="1600" b="1" dirty="0">
+                <a:solidFill>
+                  <a:schemeClr val="bg1"/>
+                </a:solidFill>
+                <a:latin typeface="Cambria" pitchFamily="34" charset="0"/>
+                <a:ea typeface="Cambria" pitchFamily="34" charset="-122"/>
+                <a:cs typeface="Cambria" pitchFamily="34" charset="-120"/>
+              </a:rPr>
+              <a:t>By the company's account</a:t>
+            </a:r>
+            <a:endParaRPr lang="en-US" sz="1600" dirty="0"/>
+          </a:p>
+        </p:txBody>
+      </p:sp>
+      <p:sp>
+        <p:nvSpPr>
+          <p:cNvPr id="16" name="Card text"/>
+          <p:cNvSpPr txBox="1"/>
+          <p:nvPr/>
+        </p:nvSpPr>
+        <p:spPr>
+          <a:xfrm>
+            <a:off x="8310677" y="2798064"/>
+            <a:ext cx="3149498" cy="868680"/>
+          </a:xfrm>
+          <a:prstGeom prst="rect">
+            <a:avLst/>
+          </a:prstGeom>
+          <a:noFill/>
+          <a:ln/>
+        </p:spPr>
+        <p:txBody>
+          <a:bodyPr wrap="square" lIns="0" tIns="0" rIns="0" bIns="0" rtlCol="0" anchor="t"/>
+          <a:lstStyle/>
+          <a:p>
+            <a:pPr indent="0" marL="0">
+              <a:buNone/>
+            </a:pPr>
+            <a:r>
+              <a:rPr lang="en-US" sz="1300" dirty="0">
+                <a:solidFill>
+                  <a:schemeClr val="bg2"/>
+                </a:solidFill>
+              </a:rPr>
+              <a:t>75 percent of potential in-flight events mitigated in 2008; some maintenance intervals up to 50 percent longer.</a:t>
+            </a:r>
+            <a:endParaRPr lang="en-US" sz="1300" dirty="0"/>
+          </a:p>
+        </p:txBody>
+      </p:sp>
+      <p:sp>
+        <p:nvSpPr>
+          <p:cNvPr id="17" name="Card"/>
+          <p:cNvSpPr/>
+          <p:nvPr/>
+        </p:nvSpPr>
+        <p:spPr>
+          <a:xfrm>
+            <a:off x="548640" y="4069080"/>
+            <a:ext cx="3515258" cy="2103120"/>
+          </a:xfrm>
+          <a:prstGeom prst="roundRect">
+            <a:avLst>
+              <a:gd name="adj" fmla="val 3478"/>
+            </a:avLst>
+          </a:prstGeom>
+          <a:solidFill>
+            <a:schemeClr val="bg2"/>
+          </a:solidFill>
+          <a:ln w="9525">
+            <a:solidFill>
+              <a:srgbClr val="C4CBD8"/>
+            </a:solidFill>
+            <a:prstDash val="solid"/>
+          </a:ln>
+        </p:spPr>
+      </p:sp>
+      <p:sp>
+        <p:nvSpPr>
+          <p:cNvPr id="18" name="Card label"/>
+          <p:cNvSpPr txBox="1"/>
+          <p:nvPr/>
+        </p:nvSpPr>
+        <p:spPr>
+          <a:xfrm>
+            <a:off x="731520" y="4197096"/>
+            <a:ext cx="3149498" cy="310896"/>
+          </a:xfrm>
+          <a:prstGeom prst="rect">
+            <a:avLst/>
+          </a:prstGeom>
+          <a:noFill/>
+          <a:ln/>
+        </p:spPr>
+        <p:txBody>
+          <a:bodyPr wrap="square" lIns="0" tIns="0" rIns="0" bIns="0" rtlCol="0" anchor="ctr"/>
+          <a:lstStyle/>
+          <a:p>
+            <a:pPr indent="0" marL="0">
+              <a:buNone/>
+            </a:pPr>
+            <a:r>
+              <a:rPr lang="en-US" sz="1300" b="1" dirty="0">
+                <a:solidFill>
+                  <a:schemeClr val="accent1"/>
+                </a:solidFill>
+              </a:rPr>
+              <a:t>Making it work</a:t>
+            </a:r>
+            <a:endParaRPr lang="en-US" sz="1300" dirty="0"/>
+          </a:p>
+        </p:txBody>
+      </p:sp>
+      <p:sp>
+        <p:nvSpPr>
+          <p:cNvPr id="19" name="Card head"/>
+          <p:cNvSpPr txBox="1"/>
+          <p:nvPr/>
+        </p:nvSpPr>
+        <p:spPr>
+          <a:xfrm>
+            <a:off x="731520" y="4526280"/>
+            <a:ext cx="3149498" cy="576072"/>
+          </a:xfrm>
+          <a:prstGeom prst="rect">
+            <a:avLst/>
+          </a:prstGeom>
+          <a:noFill/>
+          <a:ln/>
+        </p:spPr>
+        <p:txBody>
+          <a:bodyPr wrap="square" lIns="0" tIns="0" rIns="0" bIns="0" rtlCol="0" anchor="t"/>
+          <a:lstStyle/>
+          <a:p>
+            <a:pPr indent="0" marL="0">
+              <a:buNone/>
+            </a:pPr>
+            <a:r>
+              <a:rPr lang="en-US" sz="1600" b="1" dirty="0">
+                <a:solidFill>
+                  <a:schemeClr val="tx1"/>
+                </a:solidFill>
+                <a:latin typeface="Cambria" pitchFamily="34" charset="0"/>
+                <a:ea typeface="Cambria" pitchFamily="34" charset="-122"/>
+                <a:cs typeface="Cambria" pitchFamily="34" charset="-120"/>
+              </a:rPr>
+              <a:t>People, and limits</a:t>
+            </a:r>
+            <a:endParaRPr lang="en-US" sz="1600" dirty="0"/>
+          </a:p>
+        </p:txBody>
+      </p:sp>
+      <p:sp>
+        <p:nvSpPr>
+          <p:cNvPr id="20" name="Card text"/>
+          <p:cNvSpPr txBox="1"/>
+          <p:nvPr/>
+        </p:nvSpPr>
+        <p:spPr>
+          <a:xfrm>
+            <a:off x="731520" y="5175504"/>
+            <a:ext cx="3149498" cy="868680"/>
+          </a:xfrm>
+          <a:prstGeom prst="rect">
+            <a:avLst/>
+          </a:prstGeom>
+          <a:noFill/>
+          <a:ln/>
+        </p:spPr>
+        <p:txBody>
+          <a:bodyPr wrap="square" lIns="0" tIns="0" rIns="0" bIns="0" rtlCol="0" anchor="t"/>
+          <a:lstStyle/>
+          <a:p>
+            <a:pPr indent="0" marL="0">
+              <a:buNone/>
+            </a:pPr>
+            <a:r>
+              <a:rPr lang="en-US" sz="1300" dirty="0">
+                <a:solidFill>
+                  <a:schemeClr val="tx2"/>
+                </a:solidFill>
+              </a:rPr>
+              <a:t>Analysts confirm what the algorithms flag; the Trent 1000 and 2020 showed the risks of selling hours.</a:t>
+            </a:r>
+            <a:endParaRPr lang="en-US" sz="1300" dirty="0"/>
+          </a:p>
+        </p:txBody>
+      </p:sp>
+      <p:sp>
+        <p:nvSpPr>
+          <p:cNvPr id="21" name="Card"/>
+          <p:cNvSpPr/>
+          <p:nvPr/>
+        </p:nvSpPr>
+        <p:spPr>
+          <a:xfrm>
+            <a:off x="4338218" y="4069080"/>
+            <a:ext cx="3515258" cy="2103120"/>
+          </a:xfrm>
+          <a:prstGeom prst="roundRect">
+            <a:avLst>
+              <a:gd name="adj" fmla="val 3478"/>
+            </a:avLst>
+          </a:prstGeom>
+          <a:solidFill>
+            <a:schemeClr val="bg2"/>
+          </a:solidFill>
+          <a:ln w="9525">
+            <a:solidFill>
+              <a:srgbClr val="C4CBD8"/>
+            </a:solidFill>
+            <a:prstDash val="solid"/>
+          </a:ln>
+        </p:spPr>
+      </p:sp>
+      <p:sp>
+        <p:nvSpPr>
+          <p:cNvPr id="22" name="Card label"/>
+          <p:cNvSpPr txBox="1"/>
+          <p:nvPr/>
+        </p:nvSpPr>
+        <p:spPr>
+          <a:xfrm>
+            <a:off x="4521098" y="4197096"/>
+            <a:ext cx="3149498" cy="310896"/>
+          </a:xfrm>
+          <a:prstGeom prst="rect">
+            <a:avLst/>
+          </a:prstGeom>
+          <a:noFill/>
+          <a:ln/>
+        </p:spPr>
+        <p:txBody>
+          <a:bodyPr wrap="square" lIns="0" tIns="0" rIns="0" bIns="0" rtlCol="0" anchor="ctr"/>
+          <a:lstStyle/>
+          <a:p>
+            <a:pPr indent="0" marL="0">
+              <a:buNone/>
+            </a:pPr>
+            <a:r>
+              <a:rPr lang="en-US" sz="1300" b="1" dirty="0">
+                <a:solidFill>
+                  <a:schemeClr val="accent1"/>
+                </a:solidFill>
+              </a:rPr>
+              <a:t>What Meridian takes</a:t>
+            </a:r>
+            <a:endParaRPr lang="en-US" sz="1300" dirty="0"/>
+          </a:p>
+        </p:txBody>
+      </p:sp>
+      <p:sp>
+        <p:nvSpPr>
+          <p:cNvPr id="23" name="Card head"/>
+          <p:cNvSpPr txBox="1"/>
+          <p:nvPr/>
+        </p:nvSpPr>
+        <p:spPr>
+          <a:xfrm>
+            <a:off x="4521098" y="4526280"/>
+            <a:ext cx="3149498" cy="576072"/>
+          </a:xfrm>
+          <a:prstGeom prst="rect">
+            <a:avLst/>
+          </a:prstGeom>
+          <a:noFill/>
+          <a:ln/>
+        </p:spPr>
+        <p:txBody>
+          <a:bodyPr wrap="square" lIns="0" tIns="0" rIns="0" bIns="0" rtlCol="0" anchor="t"/>
+          <a:lstStyle/>
+          <a:p>
+            <a:pPr indent="0" marL="0">
+              <a:buNone/>
+            </a:pPr>
+            <a:r>
+              <a:rPr lang="en-US" sz="1600" b="1" dirty="0">
+                <a:solidFill>
+                  <a:schemeClr val="tx1"/>
+                </a:solidFill>
+                <a:latin typeface="Cambria" pitchFamily="34" charset="0"/>
+                <a:ea typeface="Cambria" pitchFamily="34" charset="-122"/>
+                <a:cs typeface="Cambria" pitchFamily="34" charset="-120"/>
+              </a:rPr>
+              <a:t>A twin with a monitor</a:t>
+            </a:r>
+            <a:endParaRPr lang="en-US" sz="1600" dirty="0"/>
+          </a:p>
+        </p:txBody>
+      </p:sp>
+      <p:sp>
+        <p:nvSpPr>
+          <p:cNvPr id="24" name="Card text"/>
+          <p:cNvSpPr txBox="1"/>
+          <p:nvPr/>
+        </p:nvSpPr>
+        <p:spPr>
+          <a:xfrm>
+            <a:off x="4521098" y="5175504"/>
+            <a:ext cx="3149498" cy="868680"/>
+          </a:xfrm>
+          <a:prstGeom prst="rect">
+            <a:avLst/>
+          </a:prstGeom>
+          <a:noFill/>
+          <a:ln/>
+        </p:spPr>
+        <p:txBody>
+          <a:bodyPr wrap="square" lIns="0" tIns="0" rIns="0" bIns="0" rtlCol="0" anchor="t"/>
+          <a:lstStyle/>
+          <a:p>
+            <a:pPr indent="0" marL="0">
+              <a:buNone/>
+            </a:pPr>
+            <a:r>
+              <a:rPr lang="en-US" sz="1300" dirty="0">
+                <a:solidFill>
+                  <a:schemeClr val="tx2"/>
+                </a:solidFill>
+              </a:rPr>
+              <a:t>Worked Example 15.1: give the twin a margin, and a monitor that questions its law.</a:t>
+            </a:r>
+            <a:endParaRPr lang="en-US" sz="1300" dirty="0"/>
+          </a:p>
+        </p:txBody>
+      </p:sp>
+      <p:sp>
+        <p:nvSpPr>
+          <p:cNvPr id="25" name="Card"/>
+          <p:cNvSpPr/>
+          <p:nvPr/>
+        </p:nvSpPr>
+        <p:spPr>
+          <a:xfrm>
+            <a:off x="8127797" y="4069080"/>
+            <a:ext cx="3515258" cy="2103120"/>
+          </a:xfrm>
+          <a:prstGeom prst="roundRect">
+            <a:avLst>
+              <a:gd name="adj" fmla="val 3478"/>
+            </a:avLst>
+          </a:prstGeom>
+          <a:solidFill>
+            <a:schemeClr val="bg2"/>
+          </a:solidFill>
+          <a:ln w="9525">
+            <a:solidFill>
+              <a:srgbClr val="C4CBD8"/>
+            </a:solidFill>
+            <a:prstDash val="solid"/>
+          </a:ln>
+        </p:spPr>
+      </p:sp>
+      <p:sp>
+        <p:nvSpPr>
+          <p:cNvPr id="26" name="Card label"/>
+          <p:cNvSpPr txBox="1"/>
+          <p:nvPr/>
+        </p:nvSpPr>
+        <p:spPr>
+          <a:xfrm>
+            <a:off x="8310677" y="4197096"/>
+            <a:ext cx="3149498" cy="310896"/>
+          </a:xfrm>
+          <a:prstGeom prst="rect">
+            <a:avLst/>
+          </a:prstGeom>
+          <a:noFill/>
+          <a:ln/>
+        </p:spPr>
+        <p:txBody>
+          <a:bodyPr wrap="square" lIns="0" tIns="0" rIns="0" bIns="0" rtlCol="0" anchor="ctr"/>
+          <a:lstStyle/>
+          <a:p>
+            <a:pPr indent="0" marL="0">
+              <a:buNone/>
+            </a:pPr>
+            <a:r>
+              <a:rPr lang="en-US" sz="1300" b="1" dirty="0">
+                <a:solidFill>
+                  <a:schemeClr val="accent1"/>
+                </a:solidFill>
+              </a:rPr>
+              <a:t>For the board</a:t>
+            </a:r>
+            <a:endParaRPr lang="en-US" sz="1300" dirty="0"/>
+          </a:p>
+        </p:txBody>
+      </p:sp>
+      <p:sp>
+        <p:nvSpPr>
+          <p:cNvPr id="27" name="Card head"/>
+          <p:cNvSpPr txBox="1"/>
+          <p:nvPr/>
+        </p:nvSpPr>
+        <p:spPr>
+          <a:xfrm>
+            <a:off x="8310677" y="4526280"/>
+            <a:ext cx="3149498" cy="576072"/>
+          </a:xfrm>
+          <a:prstGeom prst="rect">
+            <a:avLst/>
+          </a:prstGeom>
+          <a:noFill/>
+          <a:ln/>
+        </p:spPr>
+        <p:txBody>
+          <a:bodyPr wrap="square" lIns="0" tIns="0" rIns="0" bIns="0" rtlCol="0" anchor="t"/>
+          <a:lstStyle/>
+          <a:p>
+            <a:pPr indent="0" marL="0">
+              <a:buNone/>
+            </a:pPr>
+            <a:r>
+              <a:rPr lang="en-US" sz="1600" b="1" dirty="0">
+                <a:solidFill>
+                  <a:schemeClr val="tx1"/>
+                </a:solidFill>
+                <a:latin typeface="Cambria" pitchFamily="34" charset="0"/>
+                <a:ea typeface="Cambria" pitchFamily="34" charset="-122"/>
+                <a:cs typeface="Cambria" pitchFamily="34" charset="-120"/>
+              </a:rPr>
+              <a:t>What do we read, and how soon?</a:t>
+            </a:r>
+            <a:endParaRPr lang="en-US" sz="1600" dirty="0"/>
+          </a:p>
+        </p:txBody>
+      </p:sp>
+      <p:sp>
+        <p:nvSpPr>
+          <p:cNvPr id="28" name="Card text"/>
+          <p:cNvSpPr txBox="1"/>
+          <p:nvPr/>
+        </p:nvSpPr>
+        <p:spPr>
+          <a:xfrm>
+            <a:off x="8310677" y="5175504"/>
+            <a:ext cx="3149498" cy="868680"/>
+          </a:xfrm>
+          <a:prstGeom prst="rect">
+            <a:avLst/>
+          </a:prstGeom>
+          <a:noFill/>
+          <a:ln/>
+        </p:spPr>
+        <p:txBody>
+          <a:bodyPr wrap="square" lIns="0" tIns="0" rIns="0" bIns="0" rtlCol="0" anchor="t"/>
+          <a:lstStyle/>
+          <a:p>
+            <a:pPr indent="0" marL="0">
+              <a:buNone/>
+            </a:pPr>
+            <a:r>
+              <a:rPr lang="en-US" sz="1300" dirty="0">
+                <a:solidFill>
+                  <a:schemeClr val="tx2"/>
+                </a:solidFill>
+              </a:rPr>
+              <a:t>Which decisions may our systems take alone, and which must go to a named owner?</a:t>
+            </a:r>
+            <a:endParaRPr lang="en-US" sz="1300" dirty="0"/>
           </a:p>
         </p:txBody>
       </p:sp>
@@ -16574,7 +16647,7 @@
                   <a:schemeClr val="accent1"/>
                 </a:solidFill>
               </a:rPr>
-              <a:t>KEY TAKEAWAYS</a:t>
+              <a:t>AXIOM LAB 2.15 · MODULE AXIOM-15</a:t>
             </a:r>
             <a:endParaRPr lang="en-US" sz="1200" dirty="0"/>
           </a:p>
@@ -16615,22 +16688,105 @@
                 <a:ea typeface="Cambria" pitchFamily="34" charset="-122"/>
                 <a:cs typeface="Cambria" pitchFamily="34" charset="-120"/>
               </a:rPr>
-              <a:t>What to carry forward</a:t>
+              <a:t>A twin for capability, in AXIOM</a:t>
             </a:r>
             <a:endParaRPr lang="en-US" sz="3200" dirty="0"/>
           </a:p>
         </p:txBody>
       </p:sp>
-      <p:sp>
-        <p:nvSpPr>
-          <p:cNvPr id="5" name="Number"/>
+      <p:pic>
+        <p:nvPicPr>
+          <p:cNvPr id="5" name="AXIOM logo" descr="AXIOM">    </p:cNvPr>
+          <p:cNvPicPr>
+            <a:picLocks noChangeAspect="1"/>
+          </p:cNvPicPr>
+          <p:nvPr/>
+        </p:nvPicPr>
+        <p:blipFill>
+          <a:blip r:embed="rId1"/>
+          <a:stretch>
+            <a:fillRect/>
+          </a:stretch>
+        </p:blipFill>
+        <p:spPr>
+          <a:xfrm>
+            <a:off x="9539935" y="310896"/>
+            <a:ext cx="2103120" cy="420624"/>
+          </a:xfrm>
+          <a:prstGeom prst="rect">
+            <a:avLst/>
+          </a:prstGeom>
+        </p:spPr>
+      </p:pic>
+      <p:sp>
+        <p:nvSpPr>
+          <p:cNvPr id="6" name="Situation"/>
+          <p:cNvSpPr txBox="1"/>
+          <p:nvPr/>
+        </p:nvSpPr>
+        <p:spPr>
+          <a:xfrm>
+            <a:off x="548640" y="1645920"/>
+            <a:ext cx="11094415" cy="777240"/>
+          </a:xfrm>
+          <a:prstGeom prst="rect">
+            <a:avLst/>
+          </a:prstGeom>
+          <a:noFill/>
+          <a:ln/>
+        </p:spPr>
+        <p:txBody>
+          <a:bodyPr wrap="square" lIns="0" tIns="0" rIns="0" bIns="0" rtlCol="0" anchor="t"/>
+          <a:lstStyle/>
+          <a:p>
+            <a:pPr indent="0" marL="0">
+              <a:buNone/>
+            </a:pPr>
+            <a:r>
+              <a:rPr lang="en-US" sz="1500" dirty="0">
+                <a:solidFill>
+                  <a:schemeClr val="tx1"/>
+                </a:solidFill>
+              </a:rPr>
+              <a:t>The chief operating officer proposes to retire the engineering office's count and run Chapter 7's hiring rule on a digital twin fed by the skills survey. The audit committee wants to know what the twin would cost, which readings are worth buying, and how it would notice a change. Open AXIOM, choose Lab 2.15 and load the Meridian capability twin.</a:t>
+            </a:r>
+            <a:endParaRPr lang="en-US" sz="1500" dirty="0"/>
+          </a:p>
+        </p:txBody>
+      </p:sp>
+      <p:sp>
+        <p:nvSpPr>
+          <p:cNvPr id="7" name="Flow line"/>
           <p:cNvSpPr/>
           <p:nvPr/>
         </p:nvSpPr>
         <p:spPr>
           <a:xfrm>
-            <a:off x="548640" y="1737360"/>
-            <a:ext cx="566928" cy="566928"/>
+            <a:off x="1658082" y="2880360"/>
+            <a:ext cx="8875532" cy="0"/>
+          </a:xfrm>
+          <a:prstGeom prst="line">
+            <a:avLst/>
+          </a:prstGeom>
+          <a:noFill/>
+          <a:ln w="25400">
+            <a:solidFill>
+              <a:srgbClr val="C4CBD8"/>
+            </a:solidFill>
+            <a:prstDash val="solid"/>
+          </a:ln>
+        </p:spPr>
+      </p:sp>
+      <p:sp>
+        <p:nvSpPr>
+          <p:cNvPr id="8" name="Number"/>
+          <p:cNvSpPr/>
+          <p:nvPr/>
+        </p:nvSpPr>
+        <p:spPr>
+          <a:xfrm>
+            <a:off x="1383762" y="2606040"/>
+            <a:ext cx="548640" cy="548640"/>
           </a:xfrm>
           <a:prstGeom prst="ellipse">
             <a:avLst/>
@@ -16648,14 +16804,14 @@
       </p:sp>
       <p:sp>
         <p:nvSpPr>
-          <p:cNvPr id="6" name="Text 3"/>
+          <p:cNvPr id="9" name="Text 5"/>
           <p:cNvSpPr txBox="1"/>
           <p:nvPr/>
         </p:nvSpPr>
         <p:spPr>
           <a:xfrm>
-            <a:off x="548640" y="1737360"/>
-            <a:ext cx="566928" cy="566928"/>
+            <a:off x="1383762" y="2606040"/>
+            <a:ext cx="548640" cy="548640"/>
           </a:xfrm>
           <a:prstGeom prst="rect">
             <a:avLst/>
@@ -16671,7 +16827,7 @@
               <a:buNone/>
             </a:pPr>
             <a:r>
-              <a:rPr lang="en-US" sz="1500" b="1" dirty="0">
+              <a:rPr lang="en-US" sz="1600" b="1" dirty="0">
                 <a:solidFill>
                   <a:schemeClr val="bg1"/>
                 </a:solidFill>
@@ -16681,20 +16837,20 @@
               </a:rPr>
               <a:t>1</a:t>
             </a:r>
-            <a:endParaRPr lang="en-US" sz="1500" dirty="0"/>
-          </a:p>
-        </p:txBody>
-      </p:sp>
-      <p:sp>
-        <p:nvSpPr>
-          <p:cNvPr id="7" name="Row text"/>
+            <a:endParaRPr lang="en-US" sz="1600" dirty="0"/>
+          </a:p>
+        </p:txBody>
+      </p:sp>
+      <p:sp>
+        <p:nvSpPr>
+          <p:cNvPr id="10" name="Flow head"/>
           <p:cNvSpPr txBox="1"/>
           <p:nvPr/>
         </p:nvSpPr>
         <p:spPr>
           <a:xfrm>
-            <a:off x="1325880" y="1691640"/>
-            <a:ext cx="10317175" cy="841248"/>
+            <a:off x="621792" y="3291840"/>
+            <a:ext cx="2072579" cy="548640"/>
           </a:xfrm>
           <a:prstGeom prst="rect">
             <a:avLst/>
@@ -16703,34 +16859,73 @@
           <a:ln/>
         </p:spPr>
         <p:txBody>
-          <a:bodyPr wrap="square" lIns="0" tIns="0" rIns="0" bIns="0" rtlCol="0" anchor="ctr"/>
-          <a:lstStyle/>
-          <a:p>
-            <a:pPr indent="0" marL="0">
+          <a:bodyPr wrap="square" lIns="0" tIns="0" rIns="0" bIns="0" rtlCol="0" anchor="t"/>
+          <a:lstStyle/>
+          <a:p>
+            <a:pPr algn="ctr" indent="0" marL="0">
               <a:buNone/>
             </a:pPr>
             <a:r>
-              <a:rPr lang="en-US" sz="1500" dirty="0">
-                <a:solidFill>
-                  <a:schemeClr val="tx1"/>
-                </a:solidFill>
-              </a:rPr>
-              <a:t>A digital twin is a declared model kept running: state, law, readings, belief, rule, and envelope, each with an owner.</a:t>
-            </a:r>
-            <a:endParaRPr lang="en-US" sz="1500" dirty="0"/>
-          </a:p>
-        </p:txBody>
-      </p:sp>
-      <p:sp>
-        <p:nvSpPr>
-          <p:cNvPr id="8" name="Number"/>
+              <a:rPr lang="en-US" sz="1600" b="1" dirty="0">
+                <a:solidFill>
+                  <a:schemeClr val="tx1"/>
+                </a:solidFill>
+                <a:latin typeface="Cambria" pitchFamily="34" charset="0"/>
+                <a:ea typeface="Cambria" pitchFamily="34" charset="-122"/>
+                <a:cs typeface="Cambria" pitchFamily="34" charset="-120"/>
+              </a:rPr>
+              <a:t>Synchronize</a:t>
+            </a:r>
+            <a:endParaRPr lang="en-US" sz="1600" dirty="0"/>
+          </a:p>
+        </p:txBody>
+      </p:sp>
+      <p:sp>
+        <p:nvSpPr>
+          <p:cNvPr id="11" name="Flow text"/>
+          <p:cNvSpPr txBox="1"/>
+          <p:nvPr/>
+        </p:nvSpPr>
+        <p:spPr>
+          <a:xfrm>
+            <a:off x="640080" y="3867912"/>
+            <a:ext cx="2036003" cy="1554480"/>
+          </a:xfrm>
+          <a:prstGeom prst="rect">
+            <a:avLst/>
+          </a:prstGeom>
+          <a:noFill/>
+          <a:ln/>
+        </p:spPr>
+        <p:txBody>
+          <a:bodyPr wrap="square" lIns="0" tIns="0" rIns="0" bIns="0" rtlCol="0" anchor="t"/>
+          <a:lstStyle/>
+          <a:p>
+            <a:pPr algn="ctr" indent="0" marL="0">
+              <a:buNone/>
+            </a:pPr>
+            <a:r>
+              <a:rPr lang="en-US" sz="1400" dirty="0">
+                <a:solidFill>
+                  <a:schemeClr val="tx2"/>
+                </a:solidFill>
+              </a:rPr>
+              <a:t>Run the Kalman filter on simulated surveys; compare its error with the survey read as exact and with no readings.</a:t>
+            </a:r>
+            <a:endParaRPr lang="en-US" sz="1400" dirty="0"/>
+          </a:p>
+        </p:txBody>
+      </p:sp>
+      <p:sp>
+        <p:nvSpPr>
+          <p:cNvPr id="12" name="Number"/>
           <p:cNvSpPr/>
           <p:nvPr/>
         </p:nvSpPr>
         <p:spPr>
           <a:xfrm>
-            <a:off x="548640" y="2633472"/>
-            <a:ext cx="566928" cy="566928"/>
+            <a:off x="3602645" y="2606040"/>
+            <a:ext cx="548640" cy="548640"/>
           </a:xfrm>
           <a:prstGeom prst="ellipse">
             <a:avLst/>
@@ -16748,14 +16943,14 @@
       </p:sp>
       <p:sp>
         <p:nvSpPr>
-          <p:cNvPr id="9" name="Text 6"/>
+          <p:cNvPr id="13" name="Text 9"/>
           <p:cNvSpPr txBox="1"/>
           <p:nvPr/>
         </p:nvSpPr>
         <p:spPr>
           <a:xfrm>
-            <a:off x="548640" y="2633472"/>
-            <a:ext cx="566928" cy="566928"/>
+            <a:off x="3602645" y="2606040"/>
+            <a:ext cx="548640" cy="548640"/>
           </a:xfrm>
           <a:prstGeom prst="rect">
             <a:avLst/>
@@ -16771,7 +16966,7 @@
               <a:buNone/>
             </a:pPr>
             <a:r>
-              <a:rPr lang="en-US" sz="1500" b="1" dirty="0">
+              <a:rPr lang="en-US" sz="1600" b="1" dirty="0">
                 <a:solidFill>
                   <a:schemeClr val="bg1"/>
                 </a:solidFill>
@@ -16781,20 +16976,20 @@
               </a:rPr>
               <a:t>2</a:t>
             </a:r>
-            <a:endParaRPr lang="en-US" sz="1500" dirty="0"/>
-          </a:p>
-        </p:txBody>
-      </p:sp>
-      <p:sp>
-        <p:nvSpPr>
-          <p:cNvPr id="10" name="Row text"/>
+            <a:endParaRPr lang="en-US" sz="1600" dirty="0"/>
+          </a:p>
+        </p:txBody>
+      </p:sp>
+      <p:sp>
+        <p:nvSpPr>
+          <p:cNvPr id="14" name="Flow head"/>
           <p:cNvSpPr txBox="1"/>
           <p:nvPr/>
         </p:nvSpPr>
         <p:spPr>
           <a:xfrm>
-            <a:off x="1325880" y="2587752"/>
-            <a:ext cx="10317175" cy="841248"/>
+            <a:off x="2840675" y="3291840"/>
+            <a:ext cx="2072579" cy="548640"/>
           </a:xfrm>
           <a:prstGeom prst="rect">
             <a:avLst/>
@@ -16803,34 +16998,73 @@
           <a:ln/>
         </p:spPr>
         <p:txBody>
-          <a:bodyPr wrap="square" lIns="0" tIns="0" rIns="0" bIns="0" rtlCol="0" anchor="ctr"/>
-          <a:lstStyle/>
-          <a:p>
-            <a:pPr indent="0" marL="0">
+          <a:bodyPr wrap="square" lIns="0" tIns="0" rIns="0" bIns="0" rtlCol="0" anchor="t"/>
+          <a:lstStyle/>
+          <a:p>
+            <a:pPr algn="ctr" indent="0" marL="0">
               <a:buNone/>
             </a:pPr>
             <a:r>
-              <a:rPr lang="en-US" sz="1500" dirty="0">
-                <a:solidFill>
-                  <a:schemeClr val="tx1"/>
-                </a:solidFill>
-              </a:rPr>
-              <a:t>The belief holds all the readings say; for linear laws the Kalman filter computes it, and its error settles where the law and the readings balance.</a:t>
-            </a:r>
-            <a:endParaRPr lang="en-US" sz="1500" dirty="0"/>
-          </a:p>
-        </p:txBody>
-      </p:sp>
-      <p:sp>
-        <p:nvSpPr>
-          <p:cNvPr id="11" name="Number"/>
+              <a:rPr lang="en-US" sz="1600" b="1" dirty="0">
+                <a:solidFill>
+                  <a:schemeClr val="tx1"/>
+                </a:solidFill>
+                <a:latin typeface="Cambria" pitchFamily="34" charset="0"/>
+                <a:ea typeface="Cambria" pitchFamily="34" charset="-122"/>
+                <a:cs typeface="Cambria" pitchFamily="34" charset="-120"/>
+              </a:rPr>
+              <a:t>Decide</a:t>
+            </a:r>
+            <a:endParaRPr lang="en-US" sz="1600" dirty="0"/>
+          </a:p>
+        </p:txBody>
+      </p:sp>
+      <p:sp>
+        <p:nvSpPr>
+          <p:cNvPr id="15" name="Flow text"/>
+          <p:cNvSpPr txBox="1"/>
+          <p:nvPr/>
+        </p:nvSpPr>
+        <p:spPr>
+          <a:xfrm>
+            <a:off x="2858963" y="3867912"/>
+            <a:ext cx="2036003" cy="1554480"/>
+          </a:xfrm>
+          <a:prstGeom prst="rect">
+            <a:avLst/>
+          </a:prstGeom>
+          <a:noFill/>
+          <a:ln/>
+        </p:spPr>
+        <p:txBody>
+          <a:bodyPr wrap="square" lIns="0" tIns="0" rIns="0" bIns="0" rtlCol="0" anchor="t"/>
+          <a:lstStyle/>
+          <a:p>
+            <a:pPr algn="ctr" indent="0" marL="0">
+              <a:buNone/>
+            </a:pPr>
+            <a:r>
+              <a:rPr lang="en-US" sz="1400" dirty="0">
+                <a:solidFill>
+                  <a:schemeClr val="tx2"/>
+                </a:solidFill>
+              </a:rPr>
+              <a:t>Sweep the target for the count, the twin and the survey read as exact; mark each best target and its cost on fresh paths.</a:t>
+            </a:r>
+            <a:endParaRPr lang="en-US" sz="1400" dirty="0"/>
+          </a:p>
+        </p:txBody>
+      </p:sp>
+      <p:sp>
+        <p:nvSpPr>
+          <p:cNvPr id="16" name="Number"/>
           <p:cNvSpPr/>
           <p:nvPr/>
         </p:nvSpPr>
         <p:spPr>
           <a:xfrm>
-            <a:off x="548640" y="3529584"/>
-            <a:ext cx="566928" cy="566928"/>
+            <a:off x="5821528" y="2606040"/>
+            <a:ext cx="548640" cy="548640"/>
           </a:xfrm>
           <a:prstGeom prst="ellipse">
             <a:avLst/>
@@ -16848,14 +17082,14 @@
       </p:sp>
       <p:sp>
         <p:nvSpPr>
-          <p:cNvPr id="12" name="Text 9"/>
+          <p:cNvPr id="17" name="Text 13"/>
           <p:cNvSpPr txBox="1"/>
           <p:nvPr/>
         </p:nvSpPr>
         <p:spPr>
           <a:xfrm>
-            <a:off x="548640" y="3529584"/>
-            <a:ext cx="566928" cy="566928"/>
+            <a:off x="5821528" y="2606040"/>
+            <a:ext cx="548640" cy="548640"/>
           </a:xfrm>
           <a:prstGeom prst="rect">
             <a:avLst/>
@@ -16871,7 +17105,7 @@
               <a:buNone/>
             </a:pPr>
             <a:r>
-              <a:rPr lang="en-US" sz="1500" b="1" dirty="0">
+              <a:rPr lang="en-US" sz="1600" b="1" dirty="0">
                 <a:solidFill>
                   <a:schemeClr val="bg1"/>
                 </a:solidFill>
@@ -16881,20 +17115,20 @@
               </a:rPr>
               <a:t>3</a:t>
             </a:r>
-            <a:endParaRPr lang="en-US" sz="1500" dirty="0"/>
-          </a:p>
-        </p:txBody>
-      </p:sp>
-      <p:sp>
-        <p:nvSpPr>
-          <p:cNvPr id="13" name="Row text"/>
+            <a:endParaRPr lang="en-US" sz="1600" dirty="0"/>
+          </a:p>
+        </p:txBody>
+      </p:sp>
+      <p:sp>
+        <p:nvSpPr>
+          <p:cNvPr id="18" name="Flow head"/>
           <p:cNvSpPr txBox="1"/>
           <p:nvPr/>
         </p:nvSpPr>
         <p:spPr>
           <a:xfrm>
-            <a:off x="1325880" y="3483864"/>
-            <a:ext cx="10317175" cy="841248"/>
+            <a:off x="5059558" y="3291840"/>
+            <a:ext cx="2072579" cy="548640"/>
           </a:xfrm>
           <a:prstGeom prst="rect">
             <a:avLst/>
@@ -16903,34 +17137,73 @@
           <a:ln/>
         </p:spPr>
         <p:txBody>
-          <a:bodyPr wrap="square" lIns="0" tIns="0" rIns="0" bIns="0" rtlCol="0" anchor="ctr"/>
-          <a:lstStyle/>
-          <a:p>
-            <a:pPr indent="0" marL="0">
+          <a:bodyPr wrap="square" lIns="0" tIns="0" rIns="0" bIns="0" rtlCol="0" anchor="t"/>
+          <a:lstStyle/>
+          <a:p>
+            <a:pPr algn="ctr" indent="0" marL="0">
               <a:buNone/>
             </a:pPr>
             <a:r>
-              <a:rPr lang="en-US" sz="1500" dirty="0">
-                <a:solidFill>
-                  <a:schemeClr val="tx1"/>
-                </a:solidFill>
-              </a:rPr>
-              <a:t>Deciding on a twin costs the value of the information it lacks, and its margins must grow with its error; certainty equivalence holds only in the quadratic world.</a:t>
-            </a:r>
-            <a:endParaRPr lang="en-US" sz="1500" dirty="0"/>
-          </a:p>
-        </p:txBody>
-      </p:sp>
-      <p:sp>
-        <p:nvSpPr>
-          <p:cNvPr id="14" name="Number"/>
+              <a:rPr lang="en-US" sz="1600" b="1" dirty="0">
+                <a:solidFill>
+                  <a:schemeClr val="tx1"/>
+                </a:solidFill>
+                <a:latin typeface="Cambria" pitchFamily="34" charset="0"/>
+                <a:ea typeface="Cambria" pitchFamily="34" charset="-122"/>
+                <a:cs typeface="Cambria" pitchFamily="34" charset="-120"/>
+              </a:rPr>
+              <a:t>Price readings</a:t>
+            </a:r>
+            <a:endParaRPr lang="en-US" sz="1600" dirty="0"/>
+          </a:p>
+        </p:txBody>
+      </p:sp>
+      <p:sp>
+        <p:nvSpPr>
+          <p:cNvPr id="19" name="Flow text"/>
+          <p:cNvSpPr txBox="1"/>
+          <p:nvPr/>
+        </p:nvSpPr>
+        <p:spPr>
+          <a:xfrm>
+            <a:off x="5077846" y="3867912"/>
+            <a:ext cx="2036003" cy="1554480"/>
+          </a:xfrm>
+          <a:prstGeom prst="rect">
+            <a:avLst/>
+          </a:prstGeom>
+          <a:noFill/>
+          <a:ln/>
+        </p:spPr>
+        <p:txBody>
+          <a:bodyPr wrap="square" lIns="0" tIns="0" rIns="0" bIns="0" rtlCol="0" anchor="t"/>
+          <a:lstStyle/>
+          <a:p>
+            <a:pPr algn="ctr" indent="0" marL="0">
+              <a:buNone/>
+            </a:pPr>
+            <a:r>
+              <a:rPr lang="en-US" sz="1400" dirty="0">
+                <a:solidFill>
+                  <a:schemeClr val="tx2"/>
+                </a:solidFill>
+              </a:rPr>
+              <a:t>Vary the survey's frequency and error, and price each design against the count.</a:t>
+            </a:r>
+            <a:endParaRPr lang="en-US" sz="1400" dirty="0"/>
+          </a:p>
+        </p:txBody>
+      </p:sp>
+      <p:sp>
+        <p:nvSpPr>
+          <p:cNvPr id="20" name="Number"/>
           <p:cNvSpPr/>
           <p:nvPr/>
         </p:nvSpPr>
         <p:spPr>
           <a:xfrm>
-            <a:off x="548640" y="4425696"/>
-            <a:ext cx="566928" cy="566928"/>
+            <a:off x="8040411" y="2606040"/>
+            <a:ext cx="548640" cy="548640"/>
           </a:xfrm>
           <a:prstGeom prst="ellipse">
             <a:avLst/>
@@ -16948,14 +17221,14 @@
       </p:sp>
       <p:sp>
         <p:nvSpPr>
-          <p:cNvPr id="15" name="Text 12"/>
+          <p:cNvPr id="21" name="Text 17"/>
           <p:cNvSpPr txBox="1"/>
           <p:nvPr/>
         </p:nvSpPr>
         <p:spPr>
           <a:xfrm>
-            <a:off x="548640" y="4425696"/>
-            <a:ext cx="566928" cy="566928"/>
+            <a:off x="8040411" y="2606040"/>
+            <a:ext cx="548640" cy="548640"/>
           </a:xfrm>
           <a:prstGeom prst="rect">
             <a:avLst/>
@@ -16971,7 +17244,7 @@
               <a:buNone/>
             </a:pPr>
             <a:r>
-              <a:rPr lang="en-US" sz="1500" b="1" dirty="0">
+              <a:rPr lang="en-US" sz="1600" b="1" dirty="0">
                 <a:solidFill>
                   <a:schemeClr val="bg1"/>
                 </a:solidFill>
@@ -16981,20 +17254,20 @@
               </a:rPr>
               <a:t>4</a:t>
             </a:r>
-            <a:endParaRPr lang="en-US" sz="1500" dirty="0"/>
-          </a:p>
-        </p:txBody>
-      </p:sp>
-      <p:sp>
-        <p:nvSpPr>
-          <p:cNvPr id="16" name="Row text"/>
+            <a:endParaRPr lang="en-US" sz="1600" dirty="0"/>
+          </a:p>
+        </p:txBody>
+      </p:sp>
+      <p:sp>
+        <p:nvSpPr>
+          <p:cNvPr id="22" name="Flow head"/>
           <p:cNvSpPr txBox="1"/>
           <p:nvPr/>
         </p:nvSpPr>
         <p:spPr>
           <a:xfrm>
-            <a:off x="1325880" y="4379976"/>
-            <a:ext cx="10317175" cy="841248"/>
+            <a:off x="7278441" y="3291840"/>
+            <a:ext cx="2072579" cy="548640"/>
           </a:xfrm>
           <a:prstGeom prst="rect">
             <a:avLst/>
@@ -17003,34 +17276,73 @@
           <a:ln/>
         </p:spPr>
         <p:txBody>
-          <a:bodyPr wrap="square" lIns="0" tIns="0" rIns="0" bIns="0" rtlCol="0" anchor="ctr"/>
-          <a:lstStyle/>
-          <a:p>
-            <a:pPr indent="0" marL="0">
+          <a:bodyPr wrap="square" lIns="0" tIns="0" rIns="0" bIns="0" rtlCol="0" anchor="t"/>
+          <a:lstStyle/>
+          <a:p>
+            <a:pPr algn="ctr" indent="0" marL="0">
               <a:buNone/>
             </a:pPr>
             <a:r>
-              <a:rPr lang="en-US" sz="1500" dirty="0">
-                <a:solidFill>
-                  <a:schemeClr val="tx1"/>
-                </a:solidFill>
-              </a:rPr>
-              <a:t>A correct twin is never surprised on average; a cumulative sum of its surprises finds a changed law as fast as any test with as few false alarms.</a:t>
-            </a:r>
-            <a:endParaRPr lang="en-US" sz="1500" dirty="0"/>
-          </a:p>
-        </p:txBody>
-      </p:sp>
-      <p:sp>
-        <p:nvSpPr>
-          <p:cNvPr id="17" name="Number"/>
+              <a:rPr lang="en-US" sz="1600" b="1" dirty="0">
+                <a:solidFill>
+                  <a:schemeClr val="tx1"/>
+                </a:solidFill>
+                <a:latin typeface="Cambria" pitchFamily="34" charset="0"/>
+                <a:ea typeface="Cambria" pitchFamily="34" charset="-122"/>
+                <a:cs typeface="Cambria" pitchFamily="34" charset="-120"/>
+              </a:rPr>
+              <a:t>Monitor</a:t>
+            </a:r>
+            <a:endParaRPr lang="en-US" sz="1600" dirty="0"/>
+          </a:p>
+        </p:txBody>
+      </p:sp>
+      <p:sp>
+        <p:nvSpPr>
+          <p:cNvPr id="23" name="Flow text"/>
+          <p:cNvSpPr txBox="1"/>
+          <p:nvPr/>
+        </p:nvSpPr>
+        <p:spPr>
+          <a:xfrm>
+            <a:off x="7296729" y="3867912"/>
+            <a:ext cx="2036003" cy="1554480"/>
+          </a:xfrm>
+          <a:prstGeom prst="rect">
+            <a:avLst/>
+          </a:prstGeom>
+          <a:noFill/>
+          <a:ln/>
+        </p:spPr>
+        <p:txBody>
+          <a:bodyPr wrap="square" lIns="0" tIns="0" rIns="0" bIns="0" rtlCol="0" anchor="t"/>
+          <a:lstStyle/>
+          <a:p>
+            <a:pPr algn="ctr" indent="0" marL="0">
+              <a:buNone/>
+            </a:pPr>
+            <a:r>
+              <a:rPr lang="en-US" sz="1400" dirty="0">
+                <a:solidFill>
+                  <a:schemeClr val="tx2"/>
+                </a:solidFill>
+              </a:rPr>
+              <a:t>Set the cumulative sum's threshold for a false-alarm rate, and test it on a drift in the law.</a:t>
+            </a:r>
+            <a:endParaRPr lang="en-US" sz="1400" dirty="0"/>
+          </a:p>
+        </p:txBody>
+      </p:sp>
+      <p:sp>
+        <p:nvSpPr>
+          <p:cNvPr id="24" name="Number"/>
           <p:cNvSpPr/>
           <p:nvPr/>
         </p:nvSpPr>
         <p:spPr>
           <a:xfrm>
-            <a:off x="548640" y="5321808"/>
-            <a:ext cx="566928" cy="566928"/>
+            <a:off x="10259294" y="2606040"/>
+            <a:ext cx="548640" cy="548640"/>
           </a:xfrm>
           <a:prstGeom prst="ellipse">
             <a:avLst/>
@@ -17048,14 +17360,14 @@
       </p:sp>
       <p:sp>
         <p:nvSpPr>
-          <p:cNvPr id="18" name="Text 15"/>
+          <p:cNvPr id="25" name="Text 21"/>
           <p:cNvSpPr txBox="1"/>
           <p:nvPr/>
         </p:nvSpPr>
         <p:spPr>
           <a:xfrm>
-            <a:off x="548640" y="5321808"/>
-            <a:ext cx="566928" cy="566928"/>
+            <a:off x="10259294" y="2606040"/>
+            <a:ext cx="548640" cy="548640"/>
           </a:xfrm>
           <a:prstGeom prst="rect">
             <a:avLst/>
@@ -17071,7 +17383,7 @@
               <a:buNone/>
             </a:pPr>
             <a:r>
-              <a:rPr lang="en-US" sz="1500" b="1" dirty="0">
+              <a:rPr lang="en-US" sz="1600" b="1" dirty="0">
                 <a:solidFill>
                   <a:schemeClr val="bg1"/>
                 </a:solidFill>
@@ -17081,20 +17393,20 @@
               </a:rPr>
               <a:t>5</a:t>
             </a:r>
-            <a:endParaRPr lang="en-US" sz="1500" dirty="0"/>
-          </a:p>
-        </p:txBody>
-      </p:sp>
-      <p:sp>
-        <p:nvSpPr>
-          <p:cNvPr id="19" name="Row text"/>
+            <a:endParaRPr lang="en-US" sz="1600" dirty="0"/>
+          </a:p>
+        </p:txBody>
+      </p:sp>
+      <p:sp>
+        <p:nvSpPr>
+          <p:cNvPr id="26" name="Flow head"/>
           <p:cNvSpPr txBox="1"/>
           <p:nvPr/>
         </p:nvSpPr>
         <p:spPr>
           <a:xfrm>
-            <a:off x="1325880" y="5276088"/>
-            <a:ext cx="10317175" cy="841248"/>
+            <a:off x="9497324" y="3291840"/>
+            <a:ext cx="2072579" cy="548640"/>
           </a:xfrm>
           <a:prstGeom prst="rect">
             <a:avLst/>
@@ -17103,6 +17415,108 @@
           <a:ln/>
         </p:spPr>
         <p:txBody>
+          <a:bodyPr wrap="square" lIns="0" tIns="0" rIns="0" bIns="0" rtlCol="0" anchor="t"/>
+          <a:lstStyle/>
+          <a:p>
+            <a:pPr algn="ctr" indent="0" marL="0">
+              <a:buNone/>
+            </a:pPr>
+            <a:r>
+              <a:rPr lang="en-US" sz="1600" b="1" dirty="0">
+                <a:solidFill>
+                  <a:schemeClr val="tx1"/>
+                </a:solidFill>
+                <a:latin typeface="Cambria" pitchFamily="34" charset="0"/>
+                <a:ea typeface="Cambria" pitchFamily="34" charset="-122"/>
+                <a:cs typeface="Cambria" pitchFamily="34" charset="-120"/>
+              </a:rPr>
+              <a:t>Set the envelope</a:t>
+            </a:r>
+            <a:endParaRPr lang="en-US" sz="1600" dirty="0"/>
+          </a:p>
+        </p:txBody>
+      </p:sp>
+      <p:sp>
+        <p:nvSpPr>
+          <p:cNvPr id="27" name="Flow text"/>
+          <p:cNvSpPr txBox="1"/>
+          <p:nvPr/>
+        </p:nvSpPr>
+        <p:spPr>
+          <a:xfrm>
+            <a:off x="9515612" y="3867912"/>
+            <a:ext cx="2036003" cy="1554480"/>
+          </a:xfrm>
+          <a:prstGeom prst="rect">
+            <a:avLst/>
+          </a:prstGeom>
+          <a:noFill/>
+          <a:ln/>
+        </p:spPr>
+        <p:txBody>
+          <a:bodyPr wrap="square" lIns="0" tIns="0" rIns="0" bIns="0" rtlCol="0" anchor="t"/>
+          <a:lstStyle/>
+          <a:p>
+            <a:pPr algn="ctr" indent="0" marL="0">
+              <a:buNone/>
+            </a:pPr>
+            <a:r>
+              <a:rPr lang="en-US" sz="1400" dirty="0">
+                <a:solidFill>
+                  <a:schemeClr val="tx2"/>
+                </a:solidFill>
+              </a:rPr>
+              <a:t>Decide what the twin may do alone and when it escalates.</a:t>
+            </a:r>
+            <a:endParaRPr lang="en-US" sz="1400" dirty="0"/>
+          </a:p>
+        </p:txBody>
+      </p:sp>
+      <p:sp>
+        <p:nvSpPr>
+          <p:cNvPr id="28" name="Deliverable card"/>
+          <p:cNvSpPr/>
+          <p:nvPr/>
+        </p:nvSpPr>
+        <p:spPr>
+          <a:xfrm>
+            <a:off x="548640" y="5486400"/>
+            <a:ext cx="11094415" cy="685800"/>
+          </a:xfrm>
+          <a:prstGeom prst="roundRect">
+            <a:avLst>
+              <a:gd name="adj" fmla="val 10667"/>
+            </a:avLst>
+          </a:prstGeom>
+          <a:solidFill>
+            <a:schemeClr val="bg2"/>
+          </a:solidFill>
+          <a:ln w="9525">
+            <a:solidFill>
+              <a:srgbClr val="C4CBD8"/>
+            </a:solidFill>
+            <a:prstDash val="solid"/>
+          </a:ln>
+        </p:spPr>
+      </p:sp>
+      <p:sp>
+        <p:nvSpPr>
+          <p:cNvPr id="29" name="Deliverable"/>
+          <p:cNvSpPr txBox="1"/>
+          <p:nvPr/>
+        </p:nvSpPr>
+        <p:spPr>
+          <a:xfrm>
+            <a:off x="777240" y="5559552"/>
+            <a:ext cx="10637215" cy="539496"/>
+          </a:xfrm>
+          <a:prstGeom prst="rect">
+            <a:avLst/>
+          </a:prstGeom>
+          <a:noFill/>
+          <a:ln/>
+        </p:spPr>
+        <p:txBody>
           <a:bodyPr wrap="square" lIns="0" tIns="0" rIns="0" bIns="0" rtlCol="0" anchor="ctr"/>
           <a:lstStyle/>
           <a:p>
@@ -17110,14 +17524,22 @@
               <a:buNone/>
             </a:pPr>
             <a:r>
-              <a:rPr lang="en-US" sz="1500" dirty="0">
-                <a:solidFill>
-                  <a:schemeClr val="tx1"/>
-                </a:solidFill>
-              </a:rPr>
-              <a:t>Autonomy is a declared envelope: a guardrail, escalation on the monitor's alarm, and stability when both loops are stable. Meridian's twin costs $11.1 million more than the count, and its monitor is what keeps it honest.</a:t>
-            </a:r>
-            <a:endParaRPr lang="en-US" sz="1500" dirty="0"/>
+              <a:rPr lang="en-US" sz="1400" b="1" dirty="0">
+                <a:solidFill>
+                  <a:schemeClr val="tx1"/>
+                </a:solidFill>
+              </a:rPr>
+              <a:t>Deliverable:</a:t>
+            </a:r>
+            <a:r>
+              <a:rPr lang="en-US" sz="1400" dirty="0">
+                <a:solidFill>
+                  <a:schemeClr val="tx1"/>
+                </a:solidFill>
+              </a:rPr>
+              <a:t> a one-page note to the board: whether to retire the count, the twin's rule and margin, the readings worth buying, and the monitor and envelope the twin should run under. About 75 minutes.</a:t>
+            </a:r>
+            <a:endParaRPr lang="en-US" sz="1400" dirty="0"/>
           </a:p>
         </p:txBody>
       </p:sp>
@@ -17223,7 +17645,7 @@
                   <a:schemeClr val="accent1"/>
                 </a:solidFill>
               </a:rPr>
-              <a:t>THIS WEEK'S LABORATORY</a:t>
+              <a:t>KEY TAKEAWAYS</a:t>
             </a:r>
             <a:endParaRPr lang="en-US" sz="1200" dirty="0"/>
           </a:p>
@@ -17264,7 +17686,7 @@
                 <a:ea typeface="Cambria" pitchFamily="34" charset="-122"/>
                 <a:cs typeface="Cambria" pitchFamily="34" charset="-120"/>
               </a:rPr>
-              <a:t>Notebook and workbook reproduce the book</a:t>
+              <a:t>What to carry forward</a:t>
             </a:r>
             <a:endParaRPr lang="en-US" sz="3200" dirty="0"/>
           </a:p>
@@ -17272,26 +17694,24 @@
       </p:sp>
       <p:sp>
         <p:nvSpPr>
-          <p:cNvPr id="5" name="Stat card"/>
+          <p:cNvPr id="5" name="Number"/>
           <p:cNvSpPr/>
           <p:nvPr/>
         </p:nvSpPr>
         <p:spPr>
           <a:xfrm>
-            <a:off x="548640" y="1691640"/>
-            <a:ext cx="2567864" cy="1691640"/>
-          </a:xfrm>
-          <a:prstGeom prst="roundRect">
-            <a:avLst>
-              <a:gd name="adj" fmla="val 4324"/>
-            </a:avLst>
+            <a:off x="548640" y="1737360"/>
+            <a:ext cx="566928" cy="566928"/>
+          </a:xfrm>
+          <a:prstGeom prst="ellipse">
+            <a:avLst/>
           </a:prstGeom>
           <a:solidFill>
-            <a:schemeClr val="tx1"/>
+            <a:schemeClr val="accent1"/>
           </a:solidFill>
-          <a:ln w="9525">
+          <a:ln w="6350">
             <a:solidFill>
-              <a:srgbClr val="0F1E3D"/>
+              <a:schemeClr val="accent1"/>
             </a:solidFill>
             <a:prstDash val="solid"/>
           </a:ln>
@@ -17299,14 +17719,14 @@
       </p:sp>
       <p:sp>
         <p:nvSpPr>
-          <p:cNvPr id="6" name="Stat value"/>
+          <p:cNvPr id="6" name="Text 3"/>
           <p:cNvSpPr txBox="1"/>
           <p:nvPr/>
         </p:nvSpPr>
         <p:spPr>
           <a:xfrm>
-            <a:off x="685800" y="1801368"/>
-            <a:ext cx="2293544" cy="914400"/>
+            <a:off x="548640" y="1737360"/>
+            <a:ext cx="566928" cy="566928"/>
           </a:xfrm>
           <a:prstGeom prst="rect">
             <a:avLst/>
@@ -17322,30 +17742,30 @@
               <a:buNone/>
             </a:pPr>
             <a:r>
-              <a:rPr lang="en-US" sz="4400" b="1" dirty="0">
-                <a:solidFill>
-                  <a:schemeClr val="accent1"/>
-                </a:solidFill>
-                <a:latin typeface="Cambria" pitchFamily="34" charset="0"/>
-                <a:ea typeface="Cambria" pitchFamily="34" charset="-122"/>
-                <a:cs typeface="Cambria" pitchFamily="34" charset="-120"/>
-              </a:rPr>
-              <a:t>202</a:t>
-            </a:r>
-            <a:endParaRPr lang="en-US" sz="4400" dirty="0"/>
-          </a:p>
-        </p:txBody>
-      </p:sp>
-      <p:sp>
-        <p:nvSpPr>
-          <p:cNvPr id="7" name="Stat label"/>
+              <a:rPr lang="en-US" sz="1500" b="1" dirty="0">
+                <a:solidFill>
+                  <a:schemeClr val="bg1"/>
+                </a:solidFill>
+                <a:latin typeface="Calibri" pitchFamily="34" charset="0"/>
+                <a:ea typeface="Calibri" pitchFamily="34" charset="-122"/>
+                <a:cs typeface="Calibri" pitchFamily="34" charset="-120"/>
+              </a:rPr>
+              <a:t>1</a:t>
+            </a:r>
+            <a:endParaRPr lang="en-US" sz="1500" dirty="0"/>
+          </a:p>
+        </p:txBody>
+      </p:sp>
+      <p:sp>
+        <p:nvSpPr>
+          <p:cNvPr id="7" name="Row text"/>
           <p:cNvSpPr txBox="1"/>
           <p:nvPr/>
         </p:nvSpPr>
         <p:spPr>
           <a:xfrm>
-            <a:off x="685800" y="2697480"/>
-            <a:ext cx="2293544" cy="612648"/>
+            <a:off x="1325880" y="1691640"/>
+            <a:ext cx="10317175" cy="841248"/>
           </a:xfrm>
           <a:prstGeom prst="rect">
             <a:avLst/>
@@ -17354,46 +17774,44 @@
           <a:ln/>
         </p:spPr>
         <p:txBody>
-          <a:bodyPr wrap="square" lIns="0" tIns="0" rIns="0" bIns="0" rtlCol="0" anchor="t"/>
-          <a:lstStyle/>
-          <a:p>
-            <a:pPr algn="ctr" indent="0" marL="0">
+          <a:bodyPr wrap="square" lIns="0" tIns="0" rIns="0" bIns="0" rtlCol="0" anchor="ctr"/>
+          <a:lstStyle/>
+          <a:p>
+            <a:pPr indent="0" marL="0">
               <a:buNone/>
             </a:pPr>
             <a:r>
-              <a:rPr lang="en-US" sz="1400" dirty="0">
-                <a:solidFill>
-                  <a:schemeClr val="bg2"/>
-                </a:solidFill>
-              </a:rPr>
-              <a:t>notebook checkpoints, every one PASS</a:t>
-            </a:r>
-            <a:endParaRPr lang="en-US" sz="1400" dirty="0"/>
-          </a:p>
-        </p:txBody>
-      </p:sp>
-      <p:sp>
-        <p:nvSpPr>
-          <p:cNvPr id="8" name="Stat card"/>
+              <a:rPr lang="en-US" sz="1500" dirty="0">
+                <a:solidFill>
+                  <a:schemeClr val="tx1"/>
+                </a:solidFill>
+              </a:rPr>
+              <a:t>A digital twin is a declared model kept running: state, law, readings, belief, rule, and envelope, each with an owner.</a:t>
+            </a:r>
+            <a:endParaRPr lang="en-US" sz="1500" dirty="0"/>
+          </a:p>
+        </p:txBody>
+      </p:sp>
+      <p:sp>
+        <p:nvSpPr>
+          <p:cNvPr id="8" name="Number"/>
           <p:cNvSpPr/>
           <p:nvPr/>
         </p:nvSpPr>
         <p:spPr>
           <a:xfrm>
-            <a:off x="3390824" y="1691640"/>
-            <a:ext cx="2567864" cy="1691640"/>
-          </a:xfrm>
-          <a:prstGeom prst="roundRect">
-            <a:avLst>
-              <a:gd name="adj" fmla="val 4324"/>
-            </a:avLst>
+            <a:off x="548640" y="2633472"/>
+            <a:ext cx="566928" cy="566928"/>
+          </a:xfrm>
+          <a:prstGeom prst="ellipse">
+            <a:avLst/>
           </a:prstGeom>
           <a:solidFill>
-            <a:schemeClr val="bg2"/>
+            <a:schemeClr val="accent1"/>
           </a:solidFill>
-          <a:ln w="9525">
+          <a:ln w="6350">
             <a:solidFill>
-              <a:srgbClr val="C4CBD8"/>
+              <a:schemeClr val="accent1"/>
             </a:solidFill>
             <a:prstDash val="solid"/>
           </a:ln>
@@ -17401,14 +17819,14 @@
       </p:sp>
       <p:sp>
         <p:nvSpPr>
-          <p:cNvPr id="9" name="Stat value"/>
+          <p:cNvPr id="9" name="Text 6"/>
           <p:cNvSpPr txBox="1"/>
           <p:nvPr/>
         </p:nvSpPr>
         <p:spPr>
           <a:xfrm>
-            <a:off x="3527984" y="1801368"/>
-            <a:ext cx="2293544" cy="914400"/>
+            <a:off x="548640" y="2633472"/>
+            <a:ext cx="566928" cy="566928"/>
           </a:xfrm>
           <a:prstGeom prst="rect">
             <a:avLst/>
@@ -17424,30 +17842,30 @@
               <a:buNone/>
             </a:pPr>
             <a:r>
-              <a:rPr lang="en-US" sz="4400" b="1" dirty="0">
-                <a:solidFill>
-                  <a:schemeClr val="tx1"/>
-                </a:solidFill>
-                <a:latin typeface="Cambria" pitchFamily="34" charset="0"/>
-                <a:ea typeface="Cambria" pitchFamily="34" charset="-122"/>
-                <a:cs typeface="Cambria" pitchFamily="34" charset="-120"/>
-              </a:rPr>
-              <a:t>95</a:t>
-            </a:r>
-            <a:endParaRPr lang="en-US" sz="4400" dirty="0"/>
-          </a:p>
-        </p:txBody>
-      </p:sp>
-      <p:sp>
-        <p:nvSpPr>
-          <p:cNvPr id="10" name="Stat label"/>
+              <a:rPr lang="en-US" sz="1500" b="1" dirty="0">
+                <a:solidFill>
+                  <a:schemeClr val="bg1"/>
+                </a:solidFill>
+                <a:latin typeface="Calibri" pitchFamily="34" charset="0"/>
+                <a:ea typeface="Calibri" pitchFamily="34" charset="-122"/>
+                <a:cs typeface="Calibri" pitchFamily="34" charset="-120"/>
+              </a:rPr>
+              <a:t>2</a:t>
+            </a:r>
+            <a:endParaRPr lang="en-US" sz="1500" dirty="0"/>
+          </a:p>
+        </p:txBody>
+      </p:sp>
+      <p:sp>
+        <p:nvSpPr>
+          <p:cNvPr id="10" name="Row text"/>
           <p:cNvSpPr txBox="1"/>
           <p:nvPr/>
         </p:nvSpPr>
         <p:spPr>
           <a:xfrm>
-            <a:off x="3527984" y="2697480"/>
-            <a:ext cx="2293544" cy="612648"/>
+            <a:off x="1325880" y="2587752"/>
+            <a:ext cx="10317175" cy="841248"/>
           </a:xfrm>
           <a:prstGeom prst="rect">
             <a:avLst/>
@@ -17456,46 +17874,44 @@
           <a:ln/>
         </p:spPr>
         <p:txBody>
-          <a:bodyPr wrap="square" lIns="0" tIns="0" rIns="0" bIns="0" rtlCol="0" anchor="t"/>
-          <a:lstStyle/>
-          <a:p>
-            <a:pPr algn="ctr" indent="0" marL="0">
+          <a:bodyPr wrap="square" lIns="0" tIns="0" rIns="0" bIns="0" rtlCol="0" anchor="ctr"/>
+          <a:lstStyle/>
+          <a:p>
+            <a:pPr indent="0" marL="0">
               <a:buNone/>
             </a:pPr>
             <a:r>
-              <a:rPr lang="en-US" sz="1400" dirty="0">
-                <a:solidFill>
-                  <a:schemeClr val="tx2"/>
-                </a:solidFill>
-              </a:rPr>
-              <a:t>workbook checks against the engine, ALL PASS</a:t>
-            </a:r>
-            <a:endParaRPr lang="en-US" sz="1400" dirty="0"/>
-          </a:p>
-        </p:txBody>
-      </p:sp>
-      <p:sp>
-        <p:nvSpPr>
-          <p:cNvPr id="11" name="Stat card"/>
+              <a:rPr lang="en-US" sz="1500" dirty="0">
+                <a:solidFill>
+                  <a:schemeClr val="tx1"/>
+                </a:solidFill>
+              </a:rPr>
+              <a:t>The belief holds all the readings say; for linear laws the Kalman filter computes it, and its error settles where the law and the readings balance.</a:t>
+            </a:r>
+            <a:endParaRPr lang="en-US" sz="1500" dirty="0"/>
+          </a:p>
+        </p:txBody>
+      </p:sp>
+      <p:sp>
+        <p:nvSpPr>
+          <p:cNvPr id="11" name="Number"/>
           <p:cNvSpPr/>
           <p:nvPr/>
         </p:nvSpPr>
         <p:spPr>
           <a:xfrm>
-            <a:off x="6233008" y="1691640"/>
-            <a:ext cx="2567864" cy="1691640"/>
-          </a:xfrm>
-          <a:prstGeom prst="roundRect">
-            <a:avLst>
-              <a:gd name="adj" fmla="val 4324"/>
-            </a:avLst>
+            <a:off x="548640" y="3529584"/>
+            <a:ext cx="566928" cy="566928"/>
+          </a:xfrm>
+          <a:prstGeom prst="ellipse">
+            <a:avLst/>
           </a:prstGeom>
           <a:solidFill>
-            <a:schemeClr val="bg2"/>
+            <a:schemeClr val="accent1"/>
           </a:solidFill>
-          <a:ln w="9525">
+          <a:ln w="6350">
             <a:solidFill>
-              <a:srgbClr val="C4CBD8"/>
+              <a:schemeClr val="accent1"/>
             </a:solidFill>
             <a:prstDash val="solid"/>
           </a:ln>
@@ -17503,14 +17919,14 @@
       </p:sp>
       <p:sp>
         <p:nvSpPr>
-          <p:cNvPr id="12" name="Stat value"/>
+          <p:cNvPr id="12" name="Text 9"/>
           <p:cNvSpPr txBox="1"/>
           <p:nvPr/>
         </p:nvSpPr>
         <p:spPr>
           <a:xfrm>
-            <a:off x="6370168" y="1801368"/>
-            <a:ext cx="2293544" cy="914400"/>
+            <a:off x="548640" y="3529584"/>
+            <a:ext cx="566928" cy="566928"/>
           </a:xfrm>
           <a:prstGeom prst="rect">
             <a:avLst/>
@@ -17526,30 +17942,30 @@
               <a:buNone/>
             </a:pPr>
             <a:r>
-              <a:rPr lang="en-US" sz="4400" b="1" dirty="0">
-                <a:solidFill>
-                  <a:schemeClr val="tx1"/>
-                </a:solidFill>
-                <a:latin typeface="Cambria" pitchFamily="34" charset="0"/>
-                <a:ea typeface="Cambria" pitchFamily="34" charset="-122"/>
-                <a:cs typeface="Cambria" pitchFamily="34" charset="-120"/>
-              </a:rPr>
-              <a:t>26215</a:t>
-            </a:r>
-            <a:endParaRPr lang="en-US" sz="4400" dirty="0"/>
-          </a:p>
-        </p:txBody>
-      </p:sp>
-      <p:sp>
-        <p:nvSpPr>
-          <p:cNvPr id="13" name="Stat label"/>
+              <a:rPr lang="en-US" sz="1500" b="1" dirty="0">
+                <a:solidFill>
+                  <a:schemeClr val="bg1"/>
+                </a:solidFill>
+                <a:latin typeface="Calibri" pitchFamily="34" charset="0"/>
+                <a:ea typeface="Calibri" pitchFamily="34" charset="-122"/>
+                <a:cs typeface="Calibri" pitchFamily="34" charset="-120"/>
+              </a:rPr>
+              <a:t>3</a:t>
+            </a:r>
+            <a:endParaRPr lang="en-US" sz="1500" dirty="0"/>
+          </a:p>
+        </p:txBody>
+      </p:sp>
+      <p:sp>
+        <p:nvSpPr>
+          <p:cNvPr id="13" name="Row text"/>
           <p:cNvSpPr txBox="1"/>
           <p:nvPr/>
         </p:nvSpPr>
         <p:spPr>
           <a:xfrm>
-            <a:off x="6370168" y="2697480"/>
-            <a:ext cx="2293544" cy="612648"/>
+            <a:off x="1325880" y="3483864"/>
+            <a:ext cx="10317175" cy="841248"/>
           </a:xfrm>
           <a:prstGeom prst="rect">
             <a:avLst/>
@@ -17558,46 +17974,44 @@
           <a:ln/>
         </p:spPr>
         <p:txBody>
-          <a:bodyPr wrap="square" lIns="0" tIns="0" rIns="0" bIns="0" rtlCol="0" anchor="t"/>
-          <a:lstStyle/>
-          <a:p>
-            <a:pPr algn="ctr" indent="0" marL="0">
+          <a:bodyPr wrap="square" lIns="0" tIns="0" rIns="0" bIns="0" rtlCol="0" anchor="ctr"/>
+          <a:lstStyle/>
+          <a:p>
+            <a:pPr indent="0" marL="0">
               <a:buNone/>
             </a:pPr>
             <a:r>
-              <a:rPr lang="en-US" sz="1400" dirty="0">
-                <a:solidFill>
-                  <a:schemeClr val="tx2"/>
-                </a:solidFill>
-              </a:rPr>
-              <a:t>the lab's seed</a:t>
-            </a:r>
-            <a:endParaRPr lang="en-US" sz="1400" dirty="0"/>
-          </a:p>
-        </p:txBody>
-      </p:sp>
-      <p:sp>
-        <p:nvSpPr>
-          <p:cNvPr id="14" name="Stat card"/>
+              <a:rPr lang="en-US" sz="1500" dirty="0">
+                <a:solidFill>
+                  <a:schemeClr val="tx1"/>
+                </a:solidFill>
+              </a:rPr>
+              <a:t>Deciding on a twin costs the value of the information it lacks, and its margins must grow with its error; certainty equivalence holds only in the quadratic world.</a:t>
+            </a:r>
+            <a:endParaRPr lang="en-US" sz="1500" dirty="0"/>
+          </a:p>
+        </p:txBody>
+      </p:sp>
+      <p:sp>
+        <p:nvSpPr>
+          <p:cNvPr id="14" name="Number"/>
           <p:cNvSpPr/>
           <p:nvPr/>
         </p:nvSpPr>
         <p:spPr>
           <a:xfrm>
-            <a:off x="9075191" y="1691640"/>
-            <a:ext cx="2567864" cy="1691640"/>
-          </a:xfrm>
-          <a:prstGeom prst="roundRect">
-            <a:avLst>
-              <a:gd name="adj" fmla="val 4324"/>
-            </a:avLst>
+            <a:off x="548640" y="4425696"/>
+            <a:ext cx="566928" cy="566928"/>
+          </a:xfrm>
+          <a:prstGeom prst="ellipse">
+            <a:avLst/>
           </a:prstGeom>
           <a:solidFill>
-            <a:schemeClr val="bg2"/>
+            <a:schemeClr val="accent1"/>
           </a:solidFill>
-          <a:ln w="9525">
+          <a:ln w="6350">
             <a:solidFill>
-              <a:srgbClr val="C4CBD8"/>
+              <a:schemeClr val="accent1"/>
             </a:solidFill>
             <a:prstDash val="solid"/>
           </a:ln>
@@ -17605,14 +18019,14 @@
       </p:sp>
       <p:sp>
         <p:nvSpPr>
-          <p:cNvPr id="15" name="Stat value"/>
+          <p:cNvPr id="15" name="Text 12"/>
           <p:cNvSpPr txBox="1"/>
           <p:nvPr/>
         </p:nvSpPr>
         <p:spPr>
           <a:xfrm>
-            <a:off x="9212351" y="1801368"/>
-            <a:ext cx="2293544" cy="914400"/>
+            <a:off x="548640" y="4425696"/>
+            <a:ext cx="566928" cy="566928"/>
           </a:xfrm>
           <a:prstGeom prst="rect">
             <a:avLst/>
@@ -17628,30 +18042,30 @@
               <a:buNone/>
             </a:pPr>
             <a:r>
-              <a:rPr lang="en-US" sz="3000" b="1" dirty="0">
-                <a:solidFill>
-                  <a:schemeClr val="tx1"/>
-                </a:solidFill>
-                <a:latin typeface="Cambria" pitchFamily="34" charset="0"/>
-                <a:ea typeface="Cambria" pitchFamily="34" charset="-122"/>
-                <a:cs typeface="Cambria" pitchFamily="34" charset="-120"/>
-              </a:rPr>
-              <a:t>AXIOM-15</a:t>
-            </a:r>
-            <a:endParaRPr lang="en-US" sz="3000" dirty="0"/>
-          </a:p>
-        </p:txBody>
-      </p:sp>
-      <p:sp>
-        <p:nvSpPr>
-          <p:cNvPr id="16" name="Stat label"/>
+              <a:rPr lang="en-US" sz="1500" b="1" dirty="0">
+                <a:solidFill>
+                  <a:schemeClr val="bg1"/>
+                </a:solidFill>
+                <a:latin typeface="Calibri" pitchFamily="34" charset="0"/>
+                <a:ea typeface="Calibri" pitchFamily="34" charset="-122"/>
+                <a:cs typeface="Calibri" pitchFamily="34" charset="-120"/>
+              </a:rPr>
+              <a:t>4</a:t>
+            </a:r>
+            <a:endParaRPr lang="en-US" sz="1500" dirty="0"/>
+          </a:p>
+        </p:txBody>
+      </p:sp>
+      <p:sp>
+        <p:nvSpPr>
+          <p:cNvPr id="16" name="Row text"/>
           <p:cNvSpPr txBox="1"/>
           <p:nvPr/>
         </p:nvSpPr>
         <p:spPr>
           <a:xfrm>
-            <a:off x="9212351" y="2697480"/>
-            <a:ext cx="2293544" cy="612648"/>
+            <a:off x="1325880" y="4379976"/>
+            <a:ext cx="10317175" cy="841248"/>
           </a:xfrm>
           <a:prstGeom prst="rect">
             <a:avLst/>
@@ -17660,34 +18074,98 @@
           <a:ln/>
         </p:spPr>
         <p:txBody>
-          <a:bodyPr wrap="square" lIns="0" tIns="0" rIns="0" bIns="0" rtlCol="0" anchor="t"/>
+          <a:bodyPr wrap="square" lIns="0" tIns="0" rIns="0" bIns="0" rtlCol="0" anchor="ctr"/>
+          <a:lstStyle/>
+          <a:p>
+            <a:pPr indent="0" marL="0">
+              <a:buNone/>
+            </a:pPr>
+            <a:r>
+              <a:rPr lang="en-US" sz="1500" dirty="0">
+                <a:solidFill>
+                  <a:schemeClr val="tx1"/>
+                </a:solidFill>
+              </a:rPr>
+              <a:t>A correct twin is never surprised on average; a cumulative sum of its surprises finds a changed law as fast as any test with as few false alarms.</a:t>
+            </a:r>
+            <a:endParaRPr lang="en-US" sz="1500" dirty="0"/>
+          </a:p>
+        </p:txBody>
+      </p:sp>
+      <p:sp>
+        <p:nvSpPr>
+          <p:cNvPr id="17" name="Number"/>
+          <p:cNvSpPr/>
+          <p:nvPr/>
+        </p:nvSpPr>
+        <p:spPr>
+          <a:xfrm>
+            <a:off x="548640" y="5321808"/>
+            <a:ext cx="566928" cy="566928"/>
+          </a:xfrm>
+          <a:prstGeom prst="ellipse">
+            <a:avLst/>
+          </a:prstGeom>
+          <a:solidFill>
+            <a:schemeClr val="accent1"/>
+          </a:solidFill>
+          <a:ln w="6350">
+            <a:solidFill>
+              <a:schemeClr val="accent1"/>
+            </a:solidFill>
+            <a:prstDash val="solid"/>
+          </a:ln>
+        </p:spPr>
+      </p:sp>
+      <p:sp>
+        <p:nvSpPr>
+          <p:cNvPr id="18" name="Text 15"/>
+          <p:cNvSpPr txBox="1"/>
+          <p:nvPr/>
+        </p:nvSpPr>
+        <p:spPr>
+          <a:xfrm>
+            <a:off x="548640" y="5321808"/>
+            <a:ext cx="566928" cy="566928"/>
+          </a:xfrm>
+          <a:prstGeom prst="rect">
+            <a:avLst/>
+          </a:prstGeom>
+          <a:noFill/>
+          <a:ln/>
+        </p:spPr>
+        <p:txBody>
+          <a:bodyPr wrap="square" lIns="0" tIns="0" rIns="0" bIns="0" rtlCol="0" anchor="ctr"/>
           <a:lstStyle/>
           <a:p>
             <a:pPr algn="ctr" indent="0" marL="0">
               <a:buNone/>
             </a:pPr>
             <a:r>
-              <a:rPr lang="en-US" sz="1400" dirty="0">
-                <a:solidFill>
-                  <a:schemeClr val="tx2"/>
-                </a:solidFill>
-              </a:rPr>
-              <a:t>AXIOM Lab 2.15</a:t>
-            </a:r>
-            <a:endParaRPr lang="en-US" sz="1400" dirty="0"/>
-          </a:p>
-        </p:txBody>
-      </p:sp>
-      <p:sp>
-        <p:nvSpPr>
-          <p:cNvPr id="17" name="Bullets"/>
+              <a:rPr lang="en-US" sz="1500" b="1" dirty="0">
+                <a:solidFill>
+                  <a:schemeClr val="bg1"/>
+                </a:solidFill>
+                <a:latin typeface="Calibri" pitchFamily="34" charset="0"/>
+                <a:ea typeface="Calibri" pitchFamily="34" charset="-122"/>
+                <a:cs typeface="Calibri" pitchFamily="34" charset="-120"/>
+              </a:rPr>
+              <a:t>5</a:t>
+            </a:r>
+            <a:endParaRPr lang="en-US" sz="1500" dirty="0"/>
+          </a:p>
+        </p:txBody>
+      </p:sp>
+      <p:sp>
+        <p:nvSpPr>
+          <p:cNvPr id="19" name="Row text"/>
           <p:cNvSpPr txBox="1"/>
           <p:nvPr/>
         </p:nvSpPr>
         <p:spPr>
           <a:xfrm>
-            <a:off x="548640" y="3703320"/>
-            <a:ext cx="11094415" cy="2468880"/>
+            <a:off x="1325880" y="5276088"/>
+            <a:ext cx="10317175" cy="841248"/>
           </a:xfrm>
           <a:prstGeom prst="rect">
             <a:avLst/>
@@ -17696,59 +18174,21 @@
           <a:ln/>
         </p:spPr>
         <p:txBody>
-          <a:bodyPr wrap="square" lIns="635" tIns="635" rIns="635" bIns="635" rtlCol="0" anchor="t"/>
-          <a:lstStyle/>
-          <a:p>
-            <a:pPr marL="228600" indent="-228600">
-              <a:spcAft>
-                <a:spcPts val="800"/>
-              </a:spcAft>
-              <a:buSzPct val="100000"/>
-              <a:buChar char="•"/>
-            </a:pPr>
-            <a:r>
-              <a:rPr lang="en-US" sz="1700" b="1" dirty="0">
-                <a:solidFill>
-                  <a:schemeClr val="tx1"/>
-                </a:solidFill>
-              </a:rPr>
-              <a:t>Notebook</a:t>
-            </a:r>
-            <a:r>
-              <a:rPr lang="en-US" sz="1700" dirty="0">
-                <a:solidFill>
-                  <a:schemeClr val="tx1"/>
-                </a:solidFill>
-              </a:rPr>
-              <a:t> DCT_V2_Ch15_Lab.ipynb: Worked Example 15.1 and the lab's five steps in six panels, with the book's seeds, ready for Colab</a:t>
-            </a:r>
-            <a:endParaRPr lang="en-US" sz="1700" dirty="0"/>
-          </a:p>
-          <a:p>
-            <a:pPr marL="228600" indent="-228600">
-              <a:spcAft>
-                <a:spcPts val="800"/>
-              </a:spcAft>
-              <a:buSzPct val="100000"/>
-              <a:buChar char="•"/>
-            </a:pPr>
-            <a:r>
-              <a:rPr lang="en-US" sz="1700" b="1" dirty="0">
-                <a:solidFill>
-                  <a:schemeClr val="tx1"/>
-                </a:solidFill>
-              </a:rPr>
-              <a:t>Workbook</a:t>
-            </a:r>
-            <a:r>
-              <a:rPr lang="en-US" sz="1700" dirty="0">
-                <a:solidFill>
-                  <a:schemeClr val="tx1"/>
-                </a:solidFill>
-              </a:rPr>
-              <a:t> DCT_V2_Ch15_Lab.xlsx: the filter's variances, one program, Table 15.3, the margins, the bias and the cumulative sum, in formulas</a:t>
-            </a:r>
-            <a:endParaRPr lang="en-US" sz="1700" dirty="0"/>
+          <a:bodyPr wrap="square" lIns="0" tIns="0" rIns="0" bIns="0" rtlCol="0" anchor="ctr"/>
+          <a:lstStyle/>
+          <a:p>
+            <a:pPr indent="0" marL="0">
+              <a:buNone/>
+            </a:pPr>
+            <a:r>
+              <a:rPr lang="en-US" sz="1500" dirty="0">
+                <a:solidFill>
+                  <a:schemeClr val="tx1"/>
+                </a:solidFill>
+              </a:rPr>
+              <a:t>Autonomy is a declared envelope: a guardrail, escalation on the monitor's alarm, and stability when both loops are stable. Meridian's twin costs $11.1 million more than the count, and its monitor is what keeps it honest.</a:t>
+            </a:r>
+            <a:endParaRPr lang="en-US" sz="1500" dirty="0"/>
           </a:p>
         </p:txBody>
       </p:sp>
@@ -17854,6 +18294,637 @@
                   <a:schemeClr val="accent1"/>
                 </a:solidFill>
               </a:rPr>
+              <a:t>THIS WEEK'S LABORATORY</a:t>
+            </a:r>
+            <a:endParaRPr lang="en-US" sz="1200" dirty="0"/>
+          </a:p>
+        </p:txBody>
+      </p:sp>
+      <p:sp>
+        <p:nvSpPr>
+          <p:cNvPr id="4" name="Text 1"/>
+          <p:cNvSpPr/>
+          <p:nvPr>
+            <p:ph idx="103" type="title" hasCustomPrompt="1"/>
+          </p:nvPr>
+        </p:nvSpPr>
+        <p:spPr>
+          <a:xfrm>
+            <a:off x="548640" y="658368"/>
+            <a:ext cx="11094415" cy="868680"/>
+          </a:xfrm>
+          <a:prstGeom prst="rect">
+            <a:avLst/>
+          </a:prstGeom>
+          <a:noFill/>
+          <a:ln/>
+        </p:spPr>
+        <p:txBody>
+          <a:bodyPr wrap="square" lIns="0" tIns="0" rIns="0" bIns="0" rtlCol="0" anchor="t"/>
+          <a:lstStyle/>
+          <a:p>
+            <a:pPr algn="l" indent="0" marL="0">
+              <a:buNone/>
+            </a:pPr>
+            <a:r>
+              <a:rPr lang="en-US" sz="3200" b="1" dirty="0">
+                <a:solidFill>
+                  <a:schemeClr val="tx1"/>
+                </a:solidFill>
+                <a:latin typeface="Cambria" pitchFamily="34" charset="0"/>
+                <a:ea typeface="Cambria" pitchFamily="34" charset="-122"/>
+                <a:cs typeface="Cambria" pitchFamily="34" charset="-120"/>
+              </a:rPr>
+              <a:t>Notebook and workbook reproduce the book</a:t>
+            </a:r>
+            <a:endParaRPr lang="en-US" sz="3200" dirty="0"/>
+          </a:p>
+        </p:txBody>
+      </p:sp>
+      <p:sp>
+        <p:nvSpPr>
+          <p:cNvPr id="5" name="Stat card"/>
+          <p:cNvSpPr/>
+          <p:nvPr/>
+        </p:nvSpPr>
+        <p:spPr>
+          <a:xfrm>
+            <a:off x="548640" y="1691640"/>
+            <a:ext cx="2567864" cy="1691640"/>
+          </a:xfrm>
+          <a:prstGeom prst="roundRect">
+            <a:avLst>
+              <a:gd name="adj" fmla="val 4324"/>
+            </a:avLst>
+          </a:prstGeom>
+          <a:solidFill>
+            <a:schemeClr val="tx1"/>
+          </a:solidFill>
+          <a:ln w="9525">
+            <a:solidFill>
+              <a:srgbClr val="0F1E3D"/>
+            </a:solidFill>
+            <a:prstDash val="solid"/>
+          </a:ln>
+        </p:spPr>
+      </p:sp>
+      <p:sp>
+        <p:nvSpPr>
+          <p:cNvPr id="6" name="Stat value"/>
+          <p:cNvSpPr txBox="1"/>
+          <p:nvPr/>
+        </p:nvSpPr>
+        <p:spPr>
+          <a:xfrm>
+            <a:off x="685800" y="1801368"/>
+            <a:ext cx="2293544" cy="914400"/>
+          </a:xfrm>
+          <a:prstGeom prst="rect">
+            <a:avLst/>
+          </a:prstGeom>
+          <a:noFill/>
+          <a:ln/>
+        </p:spPr>
+        <p:txBody>
+          <a:bodyPr wrap="square" lIns="0" tIns="0" rIns="0" bIns="0" rtlCol="0" anchor="ctr"/>
+          <a:lstStyle/>
+          <a:p>
+            <a:pPr algn="ctr" indent="0" marL="0">
+              <a:buNone/>
+            </a:pPr>
+            <a:r>
+              <a:rPr lang="en-US" sz="4400" b="1" dirty="0">
+                <a:solidFill>
+                  <a:schemeClr val="accent1"/>
+                </a:solidFill>
+                <a:latin typeface="Cambria" pitchFamily="34" charset="0"/>
+                <a:ea typeface="Cambria" pitchFamily="34" charset="-122"/>
+                <a:cs typeface="Cambria" pitchFamily="34" charset="-120"/>
+              </a:rPr>
+              <a:t>202</a:t>
+            </a:r>
+            <a:endParaRPr lang="en-US" sz="4400" dirty="0"/>
+          </a:p>
+        </p:txBody>
+      </p:sp>
+      <p:sp>
+        <p:nvSpPr>
+          <p:cNvPr id="7" name="Stat label"/>
+          <p:cNvSpPr txBox="1"/>
+          <p:nvPr/>
+        </p:nvSpPr>
+        <p:spPr>
+          <a:xfrm>
+            <a:off x="685800" y="2697480"/>
+            <a:ext cx="2293544" cy="612648"/>
+          </a:xfrm>
+          <a:prstGeom prst="rect">
+            <a:avLst/>
+          </a:prstGeom>
+          <a:noFill/>
+          <a:ln/>
+        </p:spPr>
+        <p:txBody>
+          <a:bodyPr wrap="square" lIns="0" tIns="0" rIns="0" bIns="0" rtlCol="0" anchor="t"/>
+          <a:lstStyle/>
+          <a:p>
+            <a:pPr algn="ctr" indent="0" marL="0">
+              <a:buNone/>
+            </a:pPr>
+            <a:r>
+              <a:rPr lang="en-US" sz="1400" dirty="0">
+                <a:solidFill>
+                  <a:schemeClr val="bg2"/>
+                </a:solidFill>
+              </a:rPr>
+              <a:t>notebook checkpoints, every one PASS</a:t>
+            </a:r>
+            <a:endParaRPr lang="en-US" sz="1400" dirty="0"/>
+          </a:p>
+        </p:txBody>
+      </p:sp>
+      <p:sp>
+        <p:nvSpPr>
+          <p:cNvPr id="8" name="Stat card"/>
+          <p:cNvSpPr/>
+          <p:nvPr/>
+        </p:nvSpPr>
+        <p:spPr>
+          <a:xfrm>
+            <a:off x="3390824" y="1691640"/>
+            <a:ext cx="2567864" cy="1691640"/>
+          </a:xfrm>
+          <a:prstGeom prst="roundRect">
+            <a:avLst>
+              <a:gd name="adj" fmla="val 4324"/>
+            </a:avLst>
+          </a:prstGeom>
+          <a:solidFill>
+            <a:schemeClr val="bg2"/>
+          </a:solidFill>
+          <a:ln w="9525">
+            <a:solidFill>
+              <a:srgbClr val="C4CBD8"/>
+            </a:solidFill>
+            <a:prstDash val="solid"/>
+          </a:ln>
+        </p:spPr>
+      </p:sp>
+      <p:sp>
+        <p:nvSpPr>
+          <p:cNvPr id="9" name="Stat value"/>
+          <p:cNvSpPr txBox="1"/>
+          <p:nvPr/>
+        </p:nvSpPr>
+        <p:spPr>
+          <a:xfrm>
+            <a:off x="3527984" y="1801368"/>
+            <a:ext cx="2293544" cy="914400"/>
+          </a:xfrm>
+          <a:prstGeom prst="rect">
+            <a:avLst/>
+          </a:prstGeom>
+          <a:noFill/>
+          <a:ln/>
+        </p:spPr>
+        <p:txBody>
+          <a:bodyPr wrap="square" lIns="0" tIns="0" rIns="0" bIns="0" rtlCol="0" anchor="ctr"/>
+          <a:lstStyle/>
+          <a:p>
+            <a:pPr algn="ctr" indent="0" marL="0">
+              <a:buNone/>
+            </a:pPr>
+            <a:r>
+              <a:rPr lang="en-US" sz="4400" b="1" dirty="0">
+                <a:solidFill>
+                  <a:schemeClr val="tx1"/>
+                </a:solidFill>
+                <a:latin typeface="Cambria" pitchFamily="34" charset="0"/>
+                <a:ea typeface="Cambria" pitchFamily="34" charset="-122"/>
+                <a:cs typeface="Cambria" pitchFamily="34" charset="-120"/>
+              </a:rPr>
+              <a:t>95</a:t>
+            </a:r>
+            <a:endParaRPr lang="en-US" sz="4400" dirty="0"/>
+          </a:p>
+        </p:txBody>
+      </p:sp>
+      <p:sp>
+        <p:nvSpPr>
+          <p:cNvPr id="10" name="Stat label"/>
+          <p:cNvSpPr txBox="1"/>
+          <p:nvPr/>
+        </p:nvSpPr>
+        <p:spPr>
+          <a:xfrm>
+            <a:off x="3527984" y="2697480"/>
+            <a:ext cx="2293544" cy="612648"/>
+          </a:xfrm>
+          <a:prstGeom prst="rect">
+            <a:avLst/>
+          </a:prstGeom>
+          <a:noFill/>
+          <a:ln/>
+        </p:spPr>
+        <p:txBody>
+          <a:bodyPr wrap="square" lIns="0" tIns="0" rIns="0" bIns="0" rtlCol="0" anchor="t"/>
+          <a:lstStyle/>
+          <a:p>
+            <a:pPr algn="ctr" indent="0" marL="0">
+              <a:buNone/>
+            </a:pPr>
+            <a:r>
+              <a:rPr lang="en-US" sz="1400" dirty="0">
+                <a:solidFill>
+                  <a:schemeClr val="tx2"/>
+                </a:solidFill>
+              </a:rPr>
+              <a:t>workbook checks against the engine, ALL PASS</a:t>
+            </a:r>
+            <a:endParaRPr lang="en-US" sz="1400" dirty="0"/>
+          </a:p>
+        </p:txBody>
+      </p:sp>
+      <p:sp>
+        <p:nvSpPr>
+          <p:cNvPr id="11" name="Stat card"/>
+          <p:cNvSpPr/>
+          <p:nvPr/>
+        </p:nvSpPr>
+        <p:spPr>
+          <a:xfrm>
+            <a:off x="6233008" y="1691640"/>
+            <a:ext cx="2567864" cy="1691640"/>
+          </a:xfrm>
+          <a:prstGeom prst="roundRect">
+            <a:avLst>
+              <a:gd name="adj" fmla="val 4324"/>
+            </a:avLst>
+          </a:prstGeom>
+          <a:solidFill>
+            <a:schemeClr val="bg2"/>
+          </a:solidFill>
+          <a:ln w="9525">
+            <a:solidFill>
+              <a:srgbClr val="C4CBD8"/>
+            </a:solidFill>
+            <a:prstDash val="solid"/>
+          </a:ln>
+        </p:spPr>
+      </p:sp>
+      <p:sp>
+        <p:nvSpPr>
+          <p:cNvPr id="12" name="Stat value"/>
+          <p:cNvSpPr txBox="1"/>
+          <p:nvPr/>
+        </p:nvSpPr>
+        <p:spPr>
+          <a:xfrm>
+            <a:off x="6370168" y="1801368"/>
+            <a:ext cx="2293544" cy="914400"/>
+          </a:xfrm>
+          <a:prstGeom prst="rect">
+            <a:avLst/>
+          </a:prstGeom>
+          <a:noFill/>
+          <a:ln/>
+        </p:spPr>
+        <p:txBody>
+          <a:bodyPr wrap="square" lIns="0" tIns="0" rIns="0" bIns="0" rtlCol="0" anchor="ctr"/>
+          <a:lstStyle/>
+          <a:p>
+            <a:pPr algn="ctr" indent="0" marL="0">
+              <a:buNone/>
+            </a:pPr>
+            <a:r>
+              <a:rPr lang="en-US" sz="4400" b="1" dirty="0">
+                <a:solidFill>
+                  <a:schemeClr val="tx1"/>
+                </a:solidFill>
+                <a:latin typeface="Cambria" pitchFamily="34" charset="0"/>
+                <a:ea typeface="Cambria" pitchFamily="34" charset="-122"/>
+                <a:cs typeface="Cambria" pitchFamily="34" charset="-120"/>
+              </a:rPr>
+              <a:t>26215</a:t>
+            </a:r>
+            <a:endParaRPr lang="en-US" sz="4400" dirty="0"/>
+          </a:p>
+        </p:txBody>
+      </p:sp>
+      <p:sp>
+        <p:nvSpPr>
+          <p:cNvPr id="13" name="Stat label"/>
+          <p:cNvSpPr txBox="1"/>
+          <p:nvPr/>
+        </p:nvSpPr>
+        <p:spPr>
+          <a:xfrm>
+            <a:off x="6370168" y="2697480"/>
+            <a:ext cx="2293544" cy="612648"/>
+          </a:xfrm>
+          <a:prstGeom prst="rect">
+            <a:avLst/>
+          </a:prstGeom>
+          <a:noFill/>
+          <a:ln/>
+        </p:spPr>
+        <p:txBody>
+          <a:bodyPr wrap="square" lIns="0" tIns="0" rIns="0" bIns="0" rtlCol="0" anchor="t"/>
+          <a:lstStyle/>
+          <a:p>
+            <a:pPr algn="ctr" indent="0" marL="0">
+              <a:buNone/>
+            </a:pPr>
+            <a:r>
+              <a:rPr lang="en-US" sz="1400" dirty="0">
+                <a:solidFill>
+                  <a:schemeClr val="tx2"/>
+                </a:solidFill>
+              </a:rPr>
+              <a:t>the lab's seed</a:t>
+            </a:r>
+            <a:endParaRPr lang="en-US" sz="1400" dirty="0"/>
+          </a:p>
+        </p:txBody>
+      </p:sp>
+      <p:sp>
+        <p:nvSpPr>
+          <p:cNvPr id="14" name="Stat card"/>
+          <p:cNvSpPr/>
+          <p:nvPr/>
+        </p:nvSpPr>
+        <p:spPr>
+          <a:xfrm>
+            <a:off x="9075191" y="1691640"/>
+            <a:ext cx="2567864" cy="1691640"/>
+          </a:xfrm>
+          <a:prstGeom prst="roundRect">
+            <a:avLst>
+              <a:gd name="adj" fmla="val 4324"/>
+            </a:avLst>
+          </a:prstGeom>
+          <a:solidFill>
+            <a:schemeClr val="bg2"/>
+          </a:solidFill>
+          <a:ln w="9525">
+            <a:solidFill>
+              <a:srgbClr val="C4CBD8"/>
+            </a:solidFill>
+            <a:prstDash val="solid"/>
+          </a:ln>
+        </p:spPr>
+      </p:sp>
+      <p:sp>
+        <p:nvSpPr>
+          <p:cNvPr id="15" name="Stat value"/>
+          <p:cNvSpPr txBox="1"/>
+          <p:nvPr/>
+        </p:nvSpPr>
+        <p:spPr>
+          <a:xfrm>
+            <a:off x="9212351" y="1801368"/>
+            <a:ext cx="2293544" cy="914400"/>
+          </a:xfrm>
+          <a:prstGeom prst="rect">
+            <a:avLst/>
+          </a:prstGeom>
+          <a:noFill/>
+          <a:ln/>
+        </p:spPr>
+        <p:txBody>
+          <a:bodyPr wrap="square" lIns="0" tIns="0" rIns="0" bIns="0" rtlCol="0" anchor="ctr"/>
+          <a:lstStyle/>
+          <a:p>
+            <a:pPr algn="ctr" indent="0" marL="0">
+              <a:buNone/>
+            </a:pPr>
+            <a:r>
+              <a:rPr lang="en-US" sz="3000" b="1" dirty="0">
+                <a:solidFill>
+                  <a:schemeClr val="tx1"/>
+                </a:solidFill>
+                <a:latin typeface="Cambria" pitchFamily="34" charset="0"/>
+                <a:ea typeface="Cambria" pitchFamily="34" charset="-122"/>
+                <a:cs typeface="Cambria" pitchFamily="34" charset="-120"/>
+              </a:rPr>
+              <a:t>AXIOM-15</a:t>
+            </a:r>
+            <a:endParaRPr lang="en-US" sz="3000" dirty="0"/>
+          </a:p>
+        </p:txBody>
+      </p:sp>
+      <p:sp>
+        <p:nvSpPr>
+          <p:cNvPr id="16" name="Stat label"/>
+          <p:cNvSpPr txBox="1"/>
+          <p:nvPr/>
+        </p:nvSpPr>
+        <p:spPr>
+          <a:xfrm>
+            <a:off x="9212351" y="2697480"/>
+            <a:ext cx="2293544" cy="612648"/>
+          </a:xfrm>
+          <a:prstGeom prst="rect">
+            <a:avLst/>
+          </a:prstGeom>
+          <a:noFill/>
+          <a:ln/>
+        </p:spPr>
+        <p:txBody>
+          <a:bodyPr wrap="square" lIns="0" tIns="0" rIns="0" bIns="0" rtlCol="0" anchor="t"/>
+          <a:lstStyle/>
+          <a:p>
+            <a:pPr algn="ctr" indent="0" marL="0">
+              <a:buNone/>
+            </a:pPr>
+            <a:r>
+              <a:rPr lang="en-US" sz="1400" dirty="0">
+                <a:solidFill>
+                  <a:schemeClr val="tx2"/>
+                </a:solidFill>
+              </a:rPr>
+              <a:t>AXIOM Lab 2.15</a:t>
+            </a:r>
+            <a:endParaRPr lang="en-US" sz="1400" dirty="0"/>
+          </a:p>
+        </p:txBody>
+      </p:sp>
+      <p:sp>
+        <p:nvSpPr>
+          <p:cNvPr id="17" name="Bullets"/>
+          <p:cNvSpPr txBox="1"/>
+          <p:nvPr/>
+        </p:nvSpPr>
+        <p:spPr>
+          <a:xfrm>
+            <a:off x="548640" y="3703320"/>
+            <a:ext cx="11094415" cy="2468880"/>
+          </a:xfrm>
+          <a:prstGeom prst="rect">
+            <a:avLst/>
+          </a:prstGeom>
+          <a:noFill/>
+          <a:ln/>
+        </p:spPr>
+        <p:txBody>
+          <a:bodyPr wrap="square" lIns="635" tIns="635" rIns="635" bIns="635" rtlCol="0" anchor="t"/>
+          <a:lstStyle/>
+          <a:p>
+            <a:pPr marL="228600" indent="-228600">
+              <a:spcAft>
+                <a:spcPts val="800"/>
+              </a:spcAft>
+              <a:buSzPct val="100000"/>
+              <a:buChar char="•"/>
+            </a:pPr>
+            <a:r>
+              <a:rPr lang="en-US" sz="1700" b="1" dirty="0">
+                <a:solidFill>
+                  <a:schemeClr val="tx1"/>
+                </a:solidFill>
+              </a:rPr>
+              <a:t>Notebook</a:t>
+            </a:r>
+            <a:r>
+              <a:rPr lang="en-US" sz="1700" dirty="0">
+                <a:solidFill>
+                  <a:schemeClr val="tx1"/>
+                </a:solidFill>
+              </a:rPr>
+              <a:t> DCT_V2_Ch15_Lab.ipynb: Worked Example 15.1 and the lab's five steps in six panels, with the book's seeds, ready for Colab</a:t>
+            </a:r>
+            <a:endParaRPr lang="en-US" sz="1700" dirty="0"/>
+          </a:p>
+          <a:p>
+            <a:pPr marL="228600" indent="-228600">
+              <a:spcAft>
+                <a:spcPts val="800"/>
+              </a:spcAft>
+              <a:buSzPct val="100000"/>
+              <a:buChar char="•"/>
+            </a:pPr>
+            <a:r>
+              <a:rPr lang="en-US" sz="1700" b="1" dirty="0">
+                <a:solidFill>
+                  <a:schemeClr val="tx1"/>
+                </a:solidFill>
+              </a:rPr>
+              <a:t>Workbook</a:t>
+            </a:r>
+            <a:r>
+              <a:rPr lang="en-US" sz="1700" dirty="0">
+                <a:solidFill>
+                  <a:schemeClr val="tx1"/>
+                </a:solidFill>
+              </a:rPr>
+              <a:t> DCT_V2_Ch15_Lab.xlsx: the filter's variances, one program, Table 15.3, the margins, the bias and the cumulative sum, in formulas</a:t>
+            </a:r>
+            <a:endParaRPr lang="en-US" sz="1700" dirty="0"/>
+          </a:p>
+        </p:txBody>
+      </p:sp>
+      <p:sp>
+        <p:nvSpPr>
+          <p:cNvPr id="25" name="Slide Number Placeholder 0"/>
+          <p:cNvSpPr>
+            <a:spLocks noGrp="1"/>
+          </p:cNvSpPr>
+          <p:nvPr>
+            <p:ph type="sldNum" sz="quarter" idx="4294967295"/>
+          </p:nvPr>
+        </p:nvSpPr>
+        <p:spPr>
+          <a:xfrm>
+            <a:off x="11094415" y="6382512"/>
+            <a:ext cx="548640" cy="237744"/>
+          </a:xfrm>
+          <a:prstGeom prst="rect">
+            <a:avLst/>
+          </a:prstGeom>
+          <a:extLst>
+            <a:ext uri="{C572A759-6A51-4108-AA02-DFA0A04FC94B}">
+              <ma14:wrappingTextBoxFlag xmlns:ma14="http://schemas.microsoft.com/office/mac/drawingml/2011/main" val="0"/>
+            </a:ext>
+          </a:extLst>
+        </p:spPr>
+        <p:txBody>
+          <a:bodyPr/>
+          <a:lstStyle>
+            <a:lvl1pPr>
+              <a:defRPr sz="1000">
+                <a:solidFill>
+                  <a:srgbClr val="5A6B82"/>
+                </a:solidFill>
+              </a:defRPr>
+            </a:lvl1pPr>
+          </a:lstStyle>
+          <a:p>
+            <a:pPr algn="r"/>
+            <a:fld id="{F7021451-1387-4CA6-816F-3879F97B5CBC}" type="slidenum">
+              <a:rPr b="0" lang="en-US"/>
+              <a:t>23</a:t>
+            </a:fld>
+            <a:endParaRPr lang="en-US"/>
+          </a:p>
+        </p:txBody>
+      </p:sp>
+    </p:spTree>
+  </p:cSld>
+  <p:clrMapOvr>
+    <a:masterClrMapping/>
+  </p:clrMapOvr>
+</p:sld>
+</file>
+
+<file path=ppt/slides/slide24.xml><?xml version="1.0" encoding="utf-8"?>
+<p:sld xmlns:a="http://schemas.openxmlformats.org/drawingml/2006/main" xmlns:r="http://schemas.openxmlformats.org/officeDocument/2006/relationships" xmlns:p="http://schemas.openxmlformats.org/presentationml/2006/main">
+  <p:cSld name="Slide 24">
+    <p:spTree>
+      <p:nvGrpSpPr>
+        <p:cNvPr id="1" name=""/>
+        <p:cNvGrpSpPr/>
+        <p:nvPr/>
+      </p:nvGrpSpPr>
+      <p:grpSpPr>
+        <a:xfrm>
+          <a:off x="0" y="0"/>
+          <a:ext cx="0" cy="0"/>
+          <a:chOff x="0" y="0"/>
+          <a:chExt cx="0" cy="0"/>
+        </a:xfrm>
+      </p:grpSpPr>
+      <p:sp>
+        <p:nvSpPr>
+          <p:cNvPr id="3" name="Text 1"/>
+          <p:cNvSpPr/>
+          <p:nvPr>
+            <p:ph idx="102" type="body" hasCustomPrompt="1"/>
+          </p:nvPr>
+        </p:nvSpPr>
+        <p:spPr>
+          <a:xfrm>
+            <a:off x="548640" y="347472"/>
+            <a:ext cx="11094415" cy="292608"/>
+          </a:xfrm>
+          <a:prstGeom prst="rect">
+            <a:avLst/>
+          </a:prstGeom>
+          <a:noFill/>
+          <a:ln/>
+        </p:spPr>
+        <p:txBody>
+          <a:bodyPr wrap="square" lIns="0" tIns="0" rIns="0" bIns="0" rtlCol="0"/>
+          <a:lstStyle/>
+          <a:p>
+            <a:pPr indent="0" marL="0">
+              <a:buNone/>
+            </a:pPr>
+            <a:r>
+              <a:rPr lang="en-US" sz="1200" b="1" spc="200" kern="0" dirty="0">
+                <a:solidFill>
+                  <a:schemeClr val="accent1"/>
+                </a:solidFill>
+              </a:rPr>
               <a:t>NEXT · CHAPTER 16</a:t>
             </a:r>
             <a:endParaRPr lang="en-US" sz="1200" dirty="0"/>
@@ -18040,7 +19111,7 @@
             <a:pPr algn="r"/>
             <a:fld id="{F7021451-1387-4CA6-816F-3879F97B5CBC}" type="slidenum">
               <a:rPr b="0" lang="en-US"/>
-              <a:t>23</a:t>
+              <a:t>24</a:t>
             </a:fld>
             <a:endParaRPr lang="en-US"/>
           </a:p>
@@ -18793,7 +19864,7 @@
                 <a:ea typeface="Cambria" pitchFamily="34" charset="-122"/>
                 <a:cs typeface="Cambria" pitchFamily="34" charset="-120"/>
               </a:rPr>
-              <a:t>Five sections, a worked example and a lab</a:t>
+              <a:t>Five sections, a worked example, a case and a lab</a:t>
             </a:r>
             <a:endParaRPr lang="en-US" sz="3200" dirty="0"/>
           </a:p>
@@ -19684,7 +20755,7 @@
                   <a:schemeClr val="accent1"/>
                 </a:solidFill>
               </a:rPr>
-              <a:t>AXIOM Lab 2.15</a:t>
+              <a:t>In Practice</a:t>
             </a:r>
             <a:endParaRPr lang="en-US" sz="1300" dirty="0"/>
           </a:p>
@@ -19723,7 +20794,7 @@
                 <a:ea typeface="Cambria" pitchFamily="34" charset="-122"/>
                 <a:cs typeface="Cambria" pitchFamily="34" charset="-120"/>
               </a:rPr>
-              <a:t>A Twin for Capability: Synchronize, Decide, Monitor</a:t>
+              <a:t>Rolls-Royce Watches Every Engine in Flight</a:t>
             </a:r>
             <a:endParaRPr lang="en-US" sz="1500" dirty="0"/>
           </a:p>
@@ -19738,6 +20809,144 @@
         <p:spPr>
           <a:xfrm>
             <a:off x="6415888" y="5660136"/>
+            <a:ext cx="2202104" cy="384048"/>
+          </a:xfrm>
+          <a:prstGeom prst="rect">
+            <a:avLst/>
+          </a:prstGeom>
+          <a:noFill/>
+          <a:ln/>
+        </p:spPr>
+        <p:txBody>
+          <a:bodyPr wrap="square" lIns="0" tIns="0" rIns="0" bIns="0" rtlCol="0" anchor="t"/>
+          <a:lstStyle/>
+          <a:p>
+            <a:pPr indent="0" marL="0">
+              <a:buNone/>
+            </a:pPr>
+            <a:r>
+              <a:rPr lang="en-US" sz="1300" dirty="0">
+                <a:solidFill>
+                  <a:schemeClr val="tx2"/>
+                </a:solidFill>
+              </a:rPr>
+              <a:t>At a Glance · board questions</a:t>
+            </a:r>
+            <a:endParaRPr lang="en-US" sz="1300" dirty="0"/>
+          </a:p>
+        </p:txBody>
+      </p:sp>
+      <p:sp>
+        <p:nvSpPr>
+          <p:cNvPr id="33" name="Card"/>
+          <p:cNvSpPr/>
+          <p:nvPr/>
+        </p:nvSpPr>
+        <p:spPr>
+          <a:xfrm>
+            <a:off x="9075191" y="4069080"/>
+            <a:ext cx="2567864" cy="2103120"/>
+          </a:xfrm>
+          <a:prstGeom prst="roundRect">
+            <a:avLst>
+              <a:gd name="adj" fmla="val 3478"/>
+            </a:avLst>
+          </a:prstGeom>
+          <a:solidFill>
+            <a:schemeClr val="bg2"/>
+          </a:solidFill>
+          <a:ln w="9525">
+            <a:solidFill>
+              <a:srgbClr val="C4CBD8"/>
+            </a:solidFill>
+            <a:prstDash val="solid"/>
+          </a:ln>
+        </p:spPr>
+      </p:sp>
+      <p:sp>
+        <p:nvSpPr>
+          <p:cNvPr id="34" name="Card label"/>
+          <p:cNvSpPr txBox="1"/>
+          <p:nvPr/>
+        </p:nvSpPr>
+        <p:spPr>
+          <a:xfrm>
+            <a:off x="9258071" y="4197096"/>
+            <a:ext cx="2202104" cy="310896"/>
+          </a:xfrm>
+          <a:prstGeom prst="rect">
+            <a:avLst/>
+          </a:prstGeom>
+          <a:noFill/>
+          <a:ln/>
+        </p:spPr>
+        <p:txBody>
+          <a:bodyPr wrap="square" lIns="0" tIns="0" rIns="0" bIns="0" rtlCol="0" anchor="ctr"/>
+          <a:lstStyle/>
+          <a:p>
+            <a:pPr indent="0" marL="0">
+              <a:buNone/>
+            </a:pPr>
+            <a:r>
+              <a:rPr lang="en-US" sz="1300" b="1" dirty="0">
+                <a:solidFill>
+                  <a:schemeClr val="accent1"/>
+                </a:solidFill>
+              </a:rPr>
+              <a:t>AXIOM Lab 2.15</a:t>
+            </a:r>
+            <a:endParaRPr lang="en-US" sz="1300" dirty="0"/>
+          </a:p>
+        </p:txBody>
+      </p:sp>
+      <p:sp>
+        <p:nvSpPr>
+          <p:cNvPr id="35" name="Card head"/>
+          <p:cNvSpPr txBox="1"/>
+          <p:nvPr/>
+        </p:nvSpPr>
+        <p:spPr>
+          <a:xfrm>
+            <a:off x="9258071" y="4526280"/>
+            <a:ext cx="2202104" cy="1060704"/>
+          </a:xfrm>
+          <a:prstGeom prst="rect">
+            <a:avLst/>
+          </a:prstGeom>
+          <a:noFill/>
+          <a:ln/>
+        </p:spPr>
+        <p:txBody>
+          <a:bodyPr wrap="square" lIns="0" tIns="0" rIns="0" bIns="0" rtlCol="0" anchor="t"/>
+          <a:lstStyle/>
+          <a:p>
+            <a:pPr indent="0" marL="0">
+              <a:buNone/>
+            </a:pPr>
+            <a:r>
+              <a:rPr lang="en-US" sz="1500" b="1" dirty="0">
+                <a:solidFill>
+                  <a:schemeClr val="tx1"/>
+                </a:solidFill>
+                <a:latin typeface="Cambria" pitchFamily="34" charset="0"/>
+                <a:ea typeface="Cambria" pitchFamily="34" charset="-122"/>
+                <a:cs typeface="Cambria" pitchFamily="34" charset="-120"/>
+              </a:rPr>
+              <a:t>A Twin for Capability: Synchronize, Decide, Monitor</a:t>
+            </a:r>
+            <a:endParaRPr lang="en-US" sz="1500" dirty="0"/>
+          </a:p>
+        </p:txBody>
+      </p:sp>
+      <p:sp>
+        <p:nvSpPr>
+          <p:cNvPr id="36" name="Card text"/>
+          <p:cNvSpPr txBox="1"/>
+          <p:nvPr/>
+        </p:nvSpPr>
+        <p:spPr>
+          <a:xfrm>
+            <a:off x="9258071" y="5660136"/>
             <a:ext cx="2202104" cy="384048"/>
           </a:xfrm>
           <a:prstGeom prst="rect">
